--- a/발표자료_Weather24_신동준.pptx
+++ b/발표자료_Weather24_신동준.pptx
@@ -1480,7 +1480,7 @@
           <a:p/>
           <a:p>
             <a:r>
-              <a:t>【0:40–1:30】 봉인 계약 — 코드로 강제한 것</a:t>
+              <a:t>【0:40–1:25】 봉인 계약 — 코드로 강제한 것</a:t>
             </a:r>
           </a:p>
           <a:p>
@@ -1526,7 +1526,7 @@
           <a:p/>
           <a:p>
             <a:r>
-              <a:t>【1:30–2:50】 ★ 미션 1 — 기준이 결론을 바꾼다, 그리고 앱이 한계를 인정한다</a:t>
+              <a:t>【1:25–2:40】 ★ 미션 1 — 기준이 결론을 바꾼다, 그리고 앱이 한계를 인정한다</a:t>
             </a:r>
           </a:p>
           <a:p>
@@ -1577,7 +1577,7 @@
           <a:p/>
           <a:p>
             <a:r>
-              <a:t>【2:50–3:40】 ★ 미션 4 — 같은 자료, 반대 결론  〔#v=m3〕</a:t>
+              <a:t>【2:40–3:25】 ★ 미션 4 — 같은 자료, 반대 결론  〔#v=m3〕</a:t>
             </a:r>
           </a:p>
           <a:p>
@@ -1608,7 +1608,7 @@
           <a:p/>
           <a:p>
             <a:r>
-              <a:t>【3:40–4:30】 ★ 미션 5 — 이것이 이 앱이 가장 경계한 것  〔#v=m4〕</a:t>
+              <a:t>【3:25–4:10】 ★ 미션 5 — 이것이 이 앱이 가장 경계한 것  〔#v=m4〕</a:t>
             </a:r>
           </a:p>
           <a:p>
@@ -1654,53 +1654,83 @@
           <a:p/>
           <a:p>
             <a:r>
-              <a:t>【4:30–5:40】 ★ 학생이 먼저 쓴다 — 그리고 두 번 막힌다</a:t>
-            </a:r>
-          </a:p>
-          <a:p>
-            <a:r>
-              <a:t>〔‘이 증거로 CERL 쓰기 →’ · 한 화면에 한 칸씩 나온다〕</a:t>
-            </a:r>
-          </a:p>
-          <a:p>
-            <a:r>
-              <a:t>“주장·근거·추론·한계를 한 칸씩 씁니다. 전문가 문장은 아직 없습니다. 써야 열립니다.”</a:t>
-            </a:r>
-          </a:p>
-          <a:p>
-            <a:r>
-              <a:t>〔근거 칸에 숫자만 쓰고 ‘다음 요소 →’〕</a:t>
-            </a:r>
-          </a:p>
-          <a:p>
-            <a:r>
-              <a:t> → “그 숫자가 무엇을 센 값인지 단위나 기간을 함께 써 주세요.”</a:t>
-            </a:r>
-          </a:p>
-          <a:p>
-            <a:r>
-              <a:t>“길이만 보면 아무 글자나 채워도 통과합니다. 그래서 근거에는 숫자와 단위가,</a:t>
-            </a:r>
-          </a:p>
-          <a:p>
-            <a:r>
-              <a:t> 한계에는 지역·기간·기준·원인 중 하나가 들어 있어야 통과하게 했습니다.”</a:t>
-            </a:r>
-          </a:p>
-          <a:p>
-            <a:r>
-              <a:t>〔같은 문장을 다른 칸에 복사해 붙여 넣는다〕 → “‘근거’ 칸과 같은 문장이에요.”</a:t>
-            </a:r>
-          </a:p>
-          <a:p>
-            <a:r>
-              <a:t>〔화면 안내문을 그대로 붙여 넣는다〕 → “화면의 안내 문장을 그대로 옮긴 것 같아요.”</a:t>
+              <a:t>【4:10–5:30】 ★ 학생이 먼저 쓴다 — 그리고 세 번 막힌다</a:t>
+            </a:r>
+          </a:p>
+          <a:p>
+            <a:r>
+              <a:t>〔`이 증거로 CERL 쓰기 →` · 한 화면에 한 칸씩 · 아래 문장은 메모장에 미리 열어 두고 붙여 넣는다〕</a:t>
+            </a:r>
+          </a:p>
+          <a:p>
+            <a:r>
+              <a:t>"주장·근거·추론·한계를 한 칸씩 씁니다. 전문가 문장은 아직 없습니다. 써야 열립니다."</a:t>
+            </a:r>
+          </a:p>
+          <a:p>
+            <a:r>
+              <a:t>① 주장 ← "처서가 지나도 더위가 이어진다고 판단합니다"   → 통과</a:t>
+            </a:r>
+          </a:p>
+          <a:p>
+            <a:r>
+              <a:t>② 근거 ← "과거보다 지금이 훨씬 많아졌고 그 차이가 37쯤 됩니다"</a:t>
+            </a:r>
+          </a:p>
+          <a:p>
+            <a:r>
+              <a:t>   → 막힘: "그 숫자가 무엇을 센 값인지 단위나 기간을 함께 써 주세요."</a:t>
+            </a:r>
+          </a:p>
+          <a:p>
+            <a:r>
+              <a:t>"길이만 보면 아무 글자나 채워도 통과합니다. 그래서 근거에는 숫자와 단위가 있어야 넘어갑니다."</a:t>
+            </a:r>
+          </a:p>
+          <a:p>
+            <a:r>
+              <a:t>③ 근거 고쳐 쓰기 ← "서울에서 과거 30.8일 지금 68일이었습니다"   → 통과</a:t>
+            </a:r>
+          </a:p>
+          <a:p>
+            <a:r>
+              <a:t>④ 추론 ← ③을 그대로 복사해 붙여 넣는다</a:t>
+            </a:r>
+          </a:p>
+          <a:p>
+            <a:r>
+              <a:t>   → 막힘: "‘근거’ 칸과 같은 문장이에요."</a:t>
+            </a:r>
+          </a:p>
+          <a:p>
+            <a:r>
+              <a:t>⑤ 추론 ← "절기 날짜는 그대로인데 관측된 더위만 늦어졌기 때문입니다"   → 통과</a:t>
+            </a:r>
+          </a:p>
+          <a:p>
+            <a:r>
+              <a:t>⑥ 한계 ← "이 결론은 꽤 그럴듯하다고 생각합니다 아주 확실합니다"</a:t>
+            </a:r>
+          </a:p>
+          <a:p>
+            <a:r>
+              <a:t>   → 막힘: "한계에는 어디까지 통하는지가 들어가야 해요 — 지역·기간·기준·원인 중 무엇을…"</a:t>
+            </a:r>
+          </a:p>
+          <a:p>
+            <a:r>
+              <a:t>⑦ 한계 ← "서울 한 지역의 5년 관측이라 전국으로 넓힐 수 없습니다"   → 통과</a:t>
+            </a:r>
+          </a:p>
+          <a:p>
+            <a:r>
+              <a:t>"한계 칸은 범위를 가리키는 말이 없으면 감상문이 됩니다. 그래서 그것도 검사합니다."</a:t>
             </a:r>
           </a:p>
           <a:p/>
           <a:p>
             <a:r>
-              <a:t>【5:40–6:20】 오답에 정답을 주지 않는다</a:t>
+              <a:t>【5:30–6:05】 오답에 정답을 주지 않는다</a:t>
             </a:r>
           </a:p>
           <a:p>
@@ -1741,7 +1771,7 @@
           <a:p/>
           <a:p>
             <a:r>
-              <a:t>【6:20–7:10】 AI 해커톤의 AI — 결론을 대신 쓰지 않는다</a:t>
+              <a:t>【6:05–6:50】 AI 해커톤의 AI — 결론을 대신 쓰지 않는다</a:t>
             </a:r>
           </a:p>
           <a:p>
@@ -1787,7 +1817,7 @@
           <a:p/>
           <a:p>
             <a:r>
-              <a:t>【7:10–7:50】 데이터 뷰어가 아니라는 답  〔#v=lab〕</a:t>
+              <a:t>【6:50–7:35】 데이터 뷰어가 아니라는 답  〔#v=lab〕</a:t>
             </a:r>
           </a:p>
           <a:p>
@@ -1823,7 +1853,7 @@
           <a:p/>
           <a:p>
             <a:r>
-              <a:t>【7:50–8:30】 숫자는 흔들리고 방향은 남는다  〔#v=free〕</a:t>
+              <a:t>【7:35–8:30】 숫자는 흔들리고 방향은 남는다  〔#v=free〕</a:t>
             </a:r>
           </a:p>
           <a:p>
@@ -1870,7 +1900,7 @@
           <a:p/>
           <a:p>
             <a:r>
-              <a:t>⚠ 시간이 밀리면 — 【7:10 실험실】과 【6:20 AI】를 빼고 【7:50 자유탐구】로 바로 간다.</a:t>
+              <a:t>⚠ 시간이 밀리면 — CERL 은 ②까지만(①③④⑤⑥⑦ 생략), 실험실·AI 를 빼고 자유탐구로 바로 간다.</a:t>
             </a:r>
           </a:p>
           <a:p>

--- a/발표자료_Weather24_신동준.pptx
+++ b/발표자료_Weather24_신동준.pptx
@@ -5,18 +5,18 @@
     <p:sldMasterId id="2147483648" r:id="rId1"/>
   </p:sldMasterIdLst>
   <p:notesMasterIdLst>
-    <p:notesMasterId r:id="rId11"/>
+    <p:notesMasterId r:id="rId15"/>
   </p:notesMasterIdLst>
   <p:sldIdLst>
     <p:sldId id="256" r:id="rId2"/>
-    <p:sldId id="261" r:id="rId3"/>
-    <p:sldId id="260" r:id="rId4"/>
-    <p:sldId id="282" r:id="rId5"/>
-    <p:sldId id="283" r:id="rId6"/>
-    <p:sldId id="284" r:id="rId7"/>
-    <p:sldId id="285" r:id="rId8"/>
-    <p:sldId id="286" r:id="rId9"/>
-    <p:sldId id="268" r:id="rId10"/>
+    <p:sldId id="261" r:id="rId6"/>
+    <p:sldId id="260" r:id="rId7"/>
+    <p:sldId id="282" r:id="rId8"/>
+    <p:sldId id="283" r:id="rId9"/>
+    <p:sldId id="284" r:id="rId10"/>
+    <p:sldId id="285" r:id="rId11"/>
+    <p:sldId id="286" r:id="rId12"/>
+    <p:sldId id="268" r:id="rId14"/>
   </p:sldIdLst>
   <p:sldSz cx="12192000" cy="6858000"/>
   <p:notesSz cx="9926638" cy="6797675"/>
@@ -216,7 +216,7 @@
           <a:p>
             <a:fld id="{4FDB0704-418A-42A8-B767-71FC43B0918A}" type="datetimeFigureOut">
               <a:rPr lang="ko-KR" altLang="en-US" smtClean="0"/>
-              <a:t>2026-08-04</a:t>
+              <a:t>2026-07-31</a:t>
             </a:fld>
             <a:endParaRPr lang="ko-KR" altLang="en-US"/>
           </a:p>
@@ -484,7 +484,7 @@
 </file>
 
 <file path=ppt/notesSlides/notesSlide1.xml><?xml version="1.0" encoding="utf-8"?>
-<p:notes xmlns:a="http://schemas.openxmlformats.org/drawingml/2006/main" xmlns:r="http://schemas.openxmlformats.org/officeDocument/2006/relationships" xmlns:p="http://schemas.openxmlformats.org/presentationml/2006/main">
+<p:notes xmlns:a="http://schemas.openxmlformats.org/drawingml/2006/main" xmlns:p="http://schemas.openxmlformats.org/presentationml/2006/main" xmlns:r="http://schemas.openxmlformats.org/officeDocument/2006/relationships">
   <p:cSld>
     <p:spTree>
       <p:nvGrpSpPr>
@@ -504,7 +504,7 @@
         <p:nvSpPr>
           <p:cNvPr id="2" name="Slide Image Placeholder 1"/>
           <p:cNvSpPr>
-            <a:spLocks noGrp="1" noRot="1" noChangeAspect="1"/>
+            <a:spLocks noGrp="1"/>
           </p:cNvSpPr>
           <p:nvPr>
             <p:ph type="sldImg" idx="2"/>
@@ -519,7 +519,7 @@
             <a:spLocks noGrp="1"/>
           </p:cNvSpPr>
           <p:nvPr>
-            <p:ph type="body" sz="quarter" idx="3"/>
+            <p:ph type="body" idx="3" sz="quarter"/>
           </p:nvPr>
         </p:nvSpPr>
         <p:spPr/>
@@ -616,7 +616,7 @@
             <a:spLocks noGrp="1"/>
           </p:cNvSpPr>
           <p:nvPr>
-            <p:ph type="sldNum" sz="quarter" idx="5"/>
+            <p:ph type="sldNum" idx="5" sz="quarter"/>
           </p:nvPr>
         </p:nvSpPr>
         <p:spPr/>
@@ -630,7 +630,7 @@
 </file>
 
 <file path=ppt/notesSlides/notesSlide2.xml><?xml version="1.0" encoding="utf-8"?>
-<p:notes xmlns:a="http://schemas.openxmlformats.org/drawingml/2006/main" xmlns:r="http://schemas.openxmlformats.org/officeDocument/2006/relationships" xmlns:p="http://schemas.openxmlformats.org/presentationml/2006/main">
+<p:notes xmlns:a="http://schemas.openxmlformats.org/drawingml/2006/main" xmlns:p="http://schemas.openxmlformats.org/presentationml/2006/main" xmlns:r="http://schemas.openxmlformats.org/officeDocument/2006/relationships">
   <p:cSld>
     <p:spTree>
       <p:nvGrpSpPr>
@@ -650,7 +650,7 @@
         <p:nvSpPr>
           <p:cNvPr id="2" name="Slide Image Placeholder 1"/>
           <p:cNvSpPr>
-            <a:spLocks noGrp="1" noRot="1" noChangeAspect="1"/>
+            <a:spLocks noGrp="1"/>
           </p:cNvSpPr>
           <p:nvPr>
             <p:ph type="sldImg" idx="2"/>
@@ -665,7 +665,7 @@
             <a:spLocks noGrp="1"/>
           </p:cNvSpPr>
           <p:nvPr>
-            <p:ph type="body" sz="quarter" idx="3"/>
+            <p:ph type="body" idx="3" sz="quarter"/>
           </p:nvPr>
         </p:nvSpPr>
         <p:spPr/>
@@ -762,7 +762,7 @@
             <a:spLocks noGrp="1"/>
           </p:cNvSpPr>
           <p:nvPr>
-            <p:ph type="sldNum" sz="quarter" idx="5"/>
+            <p:ph type="sldNum" idx="5" sz="quarter"/>
           </p:nvPr>
         </p:nvSpPr>
         <p:spPr/>
@@ -776,7 +776,7 @@
 </file>
 
 <file path=ppt/notesSlides/notesSlide3.xml><?xml version="1.0" encoding="utf-8"?>
-<p:notes xmlns:a="http://schemas.openxmlformats.org/drawingml/2006/main" xmlns:r="http://schemas.openxmlformats.org/officeDocument/2006/relationships" xmlns:p="http://schemas.openxmlformats.org/presentationml/2006/main">
+<p:notes xmlns:a="http://schemas.openxmlformats.org/drawingml/2006/main" xmlns:p="http://schemas.openxmlformats.org/presentationml/2006/main" xmlns:r="http://schemas.openxmlformats.org/officeDocument/2006/relationships">
   <p:cSld>
     <p:spTree>
       <p:nvGrpSpPr>
@@ -796,7 +796,7 @@
         <p:nvSpPr>
           <p:cNvPr id="2" name="Slide Image Placeholder 1"/>
           <p:cNvSpPr>
-            <a:spLocks noGrp="1" noRot="1" noChangeAspect="1"/>
+            <a:spLocks noGrp="1"/>
           </p:cNvSpPr>
           <p:nvPr>
             <p:ph type="sldImg" idx="2"/>
@@ -811,7 +811,7 @@
             <a:spLocks noGrp="1"/>
           </p:cNvSpPr>
           <p:nvPr>
-            <p:ph type="body" sz="quarter" idx="3"/>
+            <p:ph type="body" idx="3" sz="quarter"/>
           </p:nvPr>
         </p:nvSpPr>
         <p:spPr/>
@@ -912,7 +912,7 @@
             <a:spLocks noGrp="1"/>
           </p:cNvSpPr>
           <p:nvPr>
-            <p:ph type="sldNum" sz="quarter" idx="5"/>
+            <p:ph type="sldNum" idx="5" sz="quarter"/>
           </p:nvPr>
         </p:nvSpPr>
         <p:spPr/>
@@ -926,7 +926,7 @@
 </file>
 
 <file path=ppt/notesSlides/notesSlide4.xml><?xml version="1.0" encoding="utf-8"?>
-<p:notes xmlns:a="http://schemas.openxmlformats.org/drawingml/2006/main" xmlns:r="http://schemas.openxmlformats.org/officeDocument/2006/relationships" xmlns:p="http://schemas.openxmlformats.org/presentationml/2006/main">
+<p:notes xmlns:a="http://schemas.openxmlformats.org/drawingml/2006/main" xmlns:p="http://schemas.openxmlformats.org/presentationml/2006/main" xmlns:r="http://schemas.openxmlformats.org/officeDocument/2006/relationships">
   <p:cSld>
     <p:spTree>
       <p:nvGrpSpPr>
@@ -946,7 +946,7 @@
         <p:nvSpPr>
           <p:cNvPr id="2" name="Slide Image Placeholder 1"/>
           <p:cNvSpPr>
-            <a:spLocks noGrp="1" noRot="1" noChangeAspect="1"/>
+            <a:spLocks noGrp="1"/>
           </p:cNvSpPr>
           <p:nvPr>
             <p:ph type="sldImg" idx="2"/>
@@ -961,7 +961,7 @@
             <a:spLocks noGrp="1"/>
           </p:cNvSpPr>
           <p:nvPr>
-            <p:ph type="body" sz="quarter" idx="3"/>
+            <p:ph type="body" idx="3" sz="quarter"/>
           </p:nvPr>
         </p:nvSpPr>
         <p:spPr/>
@@ -1102,7 +1102,7 @@
             <a:spLocks noGrp="1"/>
           </p:cNvSpPr>
           <p:nvPr>
-            <p:ph type="sldNum" sz="quarter" idx="5"/>
+            <p:ph type="sldNum" idx="5" sz="quarter"/>
           </p:nvPr>
         </p:nvSpPr>
         <p:spPr/>
@@ -1116,7 +1116,7 @@
 </file>
 
 <file path=ppt/notesSlides/notesSlide5.xml><?xml version="1.0" encoding="utf-8"?>
-<p:notes xmlns:a="http://schemas.openxmlformats.org/drawingml/2006/main" xmlns:r="http://schemas.openxmlformats.org/officeDocument/2006/relationships" xmlns:p="http://schemas.openxmlformats.org/presentationml/2006/main">
+<p:notes xmlns:a="http://schemas.openxmlformats.org/drawingml/2006/main" xmlns:p="http://schemas.openxmlformats.org/presentationml/2006/main" xmlns:r="http://schemas.openxmlformats.org/officeDocument/2006/relationships">
   <p:cSld>
     <p:spTree>
       <p:nvGrpSpPr>
@@ -1136,7 +1136,7 @@
         <p:nvSpPr>
           <p:cNvPr id="2" name="Slide Image Placeholder 1"/>
           <p:cNvSpPr>
-            <a:spLocks noGrp="1" noRot="1" noChangeAspect="1"/>
+            <a:spLocks noGrp="1"/>
           </p:cNvSpPr>
           <p:nvPr>
             <p:ph type="sldImg" idx="2"/>
@@ -1151,7 +1151,7 @@
             <a:spLocks noGrp="1"/>
           </p:cNvSpPr>
           <p:nvPr>
-            <p:ph type="body" sz="quarter" idx="3"/>
+            <p:ph type="body" idx="3" sz="quarter"/>
           </p:nvPr>
         </p:nvSpPr>
         <p:spPr/>
@@ -1257,7 +1257,7 @@
             <a:spLocks noGrp="1"/>
           </p:cNvSpPr>
           <p:nvPr>
-            <p:ph type="sldNum" sz="quarter" idx="5"/>
+            <p:ph type="sldNum" idx="5" sz="quarter"/>
           </p:nvPr>
         </p:nvSpPr>
         <p:spPr/>
@@ -1271,7 +1271,7 @@
 </file>
 
 <file path=ppt/notesSlides/notesSlide6.xml><?xml version="1.0" encoding="utf-8"?>
-<p:notes xmlns:a="http://schemas.openxmlformats.org/drawingml/2006/main" xmlns:r="http://schemas.openxmlformats.org/officeDocument/2006/relationships" xmlns:p="http://schemas.openxmlformats.org/presentationml/2006/main">
+<p:notes xmlns:a="http://schemas.openxmlformats.org/drawingml/2006/main" xmlns:p="http://schemas.openxmlformats.org/presentationml/2006/main" xmlns:r="http://schemas.openxmlformats.org/officeDocument/2006/relationships">
   <p:cSld>
     <p:spTree>
       <p:nvGrpSpPr>
@@ -1291,7 +1291,7 @@
         <p:nvSpPr>
           <p:cNvPr id="2" name="Slide Image Placeholder 1"/>
           <p:cNvSpPr>
-            <a:spLocks noGrp="1" noRot="1" noChangeAspect="1"/>
+            <a:spLocks noGrp="1"/>
           </p:cNvSpPr>
           <p:nvPr>
             <p:ph type="sldImg" idx="2"/>
@@ -1306,7 +1306,7 @@
             <a:spLocks noGrp="1"/>
           </p:cNvSpPr>
           <p:nvPr>
-            <p:ph type="body" sz="quarter" idx="3"/>
+            <p:ph type="body" idx="3" sz="quarter"/>
           </p:nvPr>
         </p:nvSpPr>
         <p:spPr/>
@@ -1917,7 +1917,7 @@
             <a:spLocks noGrp="1"/>
           </p:cNvSpPr>
           <p:nvPr>
-            <p:ph type="sldNum" sz="quarter" idx="5"/>
+            <p:ph type="sldNum" idx="5" sz="quarter"/>
           </p:nvPr>
         </p:nvSpPr>
         <p:spPr/>
@@ -1931,7 +1931,7 @@
 </file>
 
 <file path=ppt/notesSlides/notesSlide7.xml><?xml version="1.0" encoding="utf-8"?>
-<p:notes xmlns:a="http://schemas.openxmlformats.org/drawingml/2006/main" xmlns:r="http://schemas.openxmlformats.org/officeDocument/2006/relationships" xmlns:p="http://schemas.openxmlformats.org/presentationml/2006/main">
+<p:notes xmlns:a="http://schemas.openxmlformats.org/drawingml/2006/main" xmlns:p="http://schemas.openxmlformats.org/presentationml/2006/main" xmlns:r="http://schemas.openxmlformats.org/officeDocument/2006/relationships">
   <p:cSld>
     <p:spTree>
       <p:nvGrpSpPr>
@@ -1951,7 +1951,7 @@
         <p:nvSpPr>
           <p:cNvPr id="2" name="Slide Image Placeholder 1"/>
           <p:cNvSpPr>
-            <a:spLocks noGrp="1" noRot="1" noChangeAspect="1"/>
+            <a:spLocks noGrp="1"/>
           </p:cNvSpPr>
           <p:nvPr>
             <p:ph type="sldImg" idx="2"/>
@@ -1966,7 +1966,7 @@
             <a:spLocks noGrp="1"/>
           </p:cNvSpPr>
           <p:nvPr>
-            <p:ph type="body" sz="quarter" idx="3"/>
+            <p:ph type="body" idx="3" sz="quarter"/>
           </p:nvPr>
         </p:nvSpPr>
         <p:spPr/>
@@ -2071,7 +2071,7 @@
             <a:spLocks noGrp="1"/>
           </p:cNvSpPr>
           <p:nvPr>
-            <p:ph type="sldNum" sz="quarter" idx="5"/>
+            <p:ph type="sldNum" idx="5" sz="quarter"/>
           </p:nvPr>
         </p:nvSpPr>
         <p:spPr/>
@@ -2085,7 +2085,7 @@
 </file>
 
 <file path=ppt/notesSlides/notesSlide8.xml><?xml version="1.0" encoding="utf-8"?>
-<p:notes xmlns:a="http://schemas.openxmlformats.org/drawingml/2006/main" xmlns:r="http://schemas.openxmlformats.org/officeDocument/2006/relationships" xmlns:p="http://schemas.openxmlformats.org/presentationml/2006/main">
+<p:notes xmlns:a="http://schemas.openxmlformats.org/drawingml/2006/main" xmlns:p="http://schemas.openxmlformats.org/presentationml/2006/main" xmlns:r="http://schemas.openxmlformats.org/officeDocument/2006/relationships">
   <p:cSld>
     <p:spTree>
       <p:nvGrpSpPr>
@@ -2105,7 +2105,7 @@
         <p:nvSpPr>
           <p:cNvPr id="2" name="Slide Image Placeholder 1"/>
           <p:cNvSpPr>
-            <a:spLocks noGrp="1" noRot="1" noChangeAspect="1"/>
+            <a:spLocks noGrp="1"/>
           </p:cNvSpPr>
           <p:nvPr>
             <p:ph type="sldImg" idx="2"/>
@@ -2120,7 +2120,7 @@
             <a:spLocks noGrp="1"/>
           </p:cNvSpPr>
           <p:nvPr>
-            <p:ph type="body" sz="quarter" idx="3"/>
+            <p:ph type="body" idx="3" sz="quarter"/>
           </p:nvPr>
         </p:nvSpPr>
         <p:spPr/>
@@ -2262,7 +2262,7 @@
             <a:spLocks noGrp="1"/>
           </p:cNvSpPr>
           <p:nvPr>
-            <p:ph type="sldNum" sz="quarter" idx="5"/>
+            <p:ph type="sldNum" idx="5" sz="quarter"/>
           </p:nvPr>
         </p:nvSpPr>
         <p:spPr/>
@@ -2276,7 +2276,7 @@
 </file>
 
 <file path=ppt/notesSlides/notesSlide9.xml><?xml version="1.0" encoding="utf-8"?>
-<p:notes xmlns:a="http://schemas.openxmlformats.org/drawingml/2006/main" xmlns:r="http://schemas.openxmlformats.org/officeDocument/2006/relationships" xmlns:p="http://schemas.openxmlformats.org/presentationml/2006/main">
+<p:notes xmlns:a="http://schemas.openxmlformats.org/drawingml/2006/main" xmlns:p="http://schemas.openxmlformats.org/presentationml/2006/main" xmlns:r="http://schemas.openxmlformats.org/officeDocument/2006/relationships">
   <p:cSld>
     <p:spTree>
       <p:nvGrpSpPr>
@@ -2296,7 +2296,7 @@
         <p:nvSpPr>
           <p:cNvPr id="2" name="Slide Image Placeholder 1"/>
           <p:cNvSpPr>
-            <a:spLocks noGrp="1" noRot="1" noChangeAspect="1"/>
+            <a:spLocks noGrp="1"/>
           </p:cNvSpPr>
           <p:nvPr>
             <p:ph type="sldImg" idx="2"/>
@@ -2311,7 +2311,7 @@
             <a:spLocks noGrp="1"/>
           </p:cNvSpPr>
           <p:nvPr>
-            <p:ph type="body" sz="quarter" idx="3"/>
+            <p:ph type="body" idx="3" sz="quarter"/>
           </p:nvPr>
         </p:nvSpPr>
         <p:spPr/>
@@ -2451,7 +2451,7 @@
             <a:spLocks noGrp="1"/>
           </p:cNvSpPr>
           <p:nvPr>
-            <p:ph type="sldNum" sz="quarter" idx="5"/>
+            <p:ph type="sldNum" idx="5" sz="quarter"/>
           </p:nvPr>
         </p:nvSpPr>
         <p:spPr/>
@@ -8692,7 +8692,7 @@
           <p:nvPr>
             <p:extLst>
               <p:ext uri="{D42A27DB-BD31-4B8C-83A1-F6EECF244321}">
-                <p14:modId xmlns:p14="http://schemas.microsoft.com/office/powerpoint/2010/main" val="1625832091"/>
+                <p14:modId xmlns:p14="http://schemas.microsoft.com/office/powerpoint/2010/main" val="2126647369"/>
               </p:ext>
             </p:extLst>
           </p:nvPr>
@@ -8731,7 +8731,7 @@
                     <a:p>
                       <a:pPr algn="ctr" latinLnBrk="1"/>
                       <a:r>
-                        <a:rPr lang="ko-KR" altLang="en-US" sz="1600" b="0" dirty="0">
+                        <a:rPr lang="ko-KR" altLang="en-US" sz="1200" b="0" dirty="0">
                           <a:solidFill>
                             <a:schemeClr val="bg1"/>
                           </a:solidFill>
@@ -8803,14 +8803,14 @@
                     <a:p>
                       <a:pPr algn="ctr" latinLnBrk="1"/>
                       <a:r>
-                        <a:rPr lang="en-US" altLang="ko-KR" sz="1600" b="0" dirty="0">
+                        <a:rPr lang="en-US" altLang="ko-KR" sz="1200" b="0" dirty="0">
                           <a:solidFill>
                             <a:schemeClr val="tx1"/>
                           </a:solidFill>
                         </a:rPr>
                         <a:t>팀 Weather24 (1인 팀)</a:t>
                       </a:r>
-                      <a:endParaRPr lang="ko-KR" altLang="en-US" sz="1600" b="0" dirty="0">
+                      <a:endParaRPr lang="ko-KR" altLang="en-US" sz="1200" b="0" dirty="0">
                         <a:solidFill>
                           <a:schemeClr val="tx1"/>
                         </a:solidFill>
@@ -8883,7 +8883,7 @@
                     <a:p>
                       <a:pPr algn="ctr" latinLnBrk="1"/>
                       <a:r>
-                        <a:rPr lang="ko-KR" altLang="en-US" sz="1600" b="0" dirty="0">
+                        <a:rPr lang="ko-KR" altLang="en-US" sz="1200" b="0" dirty="0">
                           <a:solidFill>
                             <a:schemeClr val="bg1"/>
                           </a:solidFill>
@@ -8955,14 +8955,14 @@
                     <a:p>
                       <a:pPr algn="ctr" latinLnBrk="1"/>
                       <a:r>
-                        <a:rPr lang="en-US" altLang="ko-KR" sz="1600" dirty="0">
+                        <a:rPr lang="en-US" altLang="ko-KR" sz="1200" dirty="0">
                           <a:solidFill>
                             <a:schemeClr val="tx1"/>
                           </a:solidFill>
                         </a:rPr>
                         <a:t>Weather24 — 절기, 아직 맞을까</a:t>
                       </a:r>
-                      <a:endParaRPr lang="ko-KR" altLang="en-US" sz="1600" dirty="0">
+                      <a:endParaRPr lang="ko-KR" altLang="en-US" sz="1200" dirty="0">
                         <a:solidFill>
                           <a:schemeClr val="tx1"/>
                         </a:solidFill>
@@ -9035,7 +9035,7 @@
                     <a:p>
                       <a:pPr algn="ctr" latinLnBrk="1"/>
                       <a:r>
-                        <a:rPr lang="ko-KR" altLang="en-US" sz="1600" b="0" dirty="0">
+                        <a:rPr lang="ko-KR" altLang="en-US" sz="1200" b="0" dirty="0">
                           <a:solidFill>
                             <a:schemeClr val="bg1"/>
                           </a:solidFill>
@@ -9045,7 +9045,7 @@
                         <a:t>결과물 접속 </a:t>
                       </a:r>
                       <a:r>
-                        <a:rPr lang="en-US" altLang="ko-KR" sz="1600" b="0" dirty="0">
+                        <a:rPr lang="en-US" altLang="ko-KR" sz="1200" b="0" dirty="0">
                           <a:solidFill>
                             <a:schemeClr val="bg1"/>
                           </a:solidFill>
@@ -9054,7 +9054,7 @@
                         </a:rPr>
                         <a:t>URL</a:t>
                       </a:r>
-                      <a:endParaRPr lang="ko-KR" altLang="en-US" sz="1600" b="0" dirty="0">
+                      <a:endParaRPr lang="ko-KR" altLang="en-US" sz="1200" b="0" dirty="0">
                         <a:solidFill>
                           <a:schemeClr val="bg1"/>
                         </a:solidFill>
@@ -9124,14 +9124,14 @@
                     <a:p>
                       <a:pPr algn="ctr" latinLnBrk="1"/>
                       <a:r>
-                        <a:rPr lang="en-US" altLang="ko-KR" sz="1600" dirty="0">
+                        <a:rPr lang="en-US" altLang="ko-KR" sz="1200" dirty="0">
                           <a:solidFill>
                             <a:schemeClr val="tx1"/>
                           </a:solidFill>
                         </a:rPr>
                         <a:t>https://weather-24solar-terms.vercel.app</a:t>
                       </a:r>
-                      <a:endParaRPr lang="ko-KR" altLang="en-US" sz="1600" dirty="0">
+                      <a:endParaRPr lang="ko-KR" altLang="en-US" sz="1200" dirty="0">
                         <a:solidFill>
                           <a:schemeClr val="tx1"/>
                         </a:solidFill>
@@ -9204,7 +9204,7 @@
                     <a:p>
                       <a:pPr algn="ctr" latinLnBrk="1"/>
                       <a:r>
-                        <a:rPr lang="ko-KR" altLang="en-US" sz="1600" b="0" dirty="0">
+                        <a:rPr lang="ko-KR" altLang="en-US" sz="1200" b="0" dirty="0">
                           <a:solidFill>
                             <a:schemeClr val="bg1"/>
                           </a:solidFill>
@@ -9276,69 +9276,14 @@
                     <a:p>
                       <a:pPr algn="ctr" latinLnBrk="1"/>
                       <a:r>
-                        <a:rPr lang="en-US" altLang="ko-KR" sz="1600" dirty="0">
+                        <a:rPr lang="en-US" altLang="ko-KR" sz="1200" dirty="0">
                           <a:solidFill>
                             <a:schemeClr val="tx1"/>
                           </a:solidFill>
                         </a:rPr>
-                        <a:t>중·고생이 ‘덥다’ 기준을 정해 24절기를 </a:t>
+                        <a:t>중·고생이 ‘덥다’ 기준을 정해 24절기를 실측 검증하는 기후 학습 웹앱</a:t>
                       </a:r>
-                      <a:br>
-                        <a:rPr lang="en-US" altLang="ko-KR" sz="1600" dirty="0">
-                          <a:solidFill>
-                            <a:schemeClr val="tx1"/>
-                          </a:solidFill>
-                        </a:rPr>
-                      </a:br>
-                      <a:r>
-                        <a:rPr lang="en-US" altLang="ko-KR" sz="1600" dirty="0" err="1">
-                          <a:solidFill>
-                            <a:schemeClr val="tx1"/>
-                          </a:solidFill>
-                        </a:rPr>
-                        <a:t>실측</a:t>
-                      </a:r>
-                      <a:r>
-                        <a:rPr lang="en-US" altLang="ko-KR" sz="1600" dirty="0">
-                          <a:solidFill>
-                            <a:schemeClr val="tx1"/>
-                          </a:solidFill>
-                        </a:rPr>
-                        <a:t> </a:t>
-                      </a:r>
-                      <a:r>
-                        <a:rPr lang="en-US" altLang="ko-KR" sz="1600" dirty="0" err="1">
-                          <a:solidFill>
-                            <a:schemeClr val="tx1"/>
-                          </a:solidFill>
-                        </a:rPr>
-                        <a:t>검증하는</a:t>
-                      </a:r>
-                      <a:r>
-                        <a:rPr lang="en-US" altLang="ko-KR" sz="1600" dirty="0">
-                          <a:solidFill>
-                            <a:schemeClr val="tx1"/>
-                          </a:solidFill>
-                        </a:rPr>
-                        <a:t> </a:t>
-                      </a:r>
-                      <a:r>
-                        <a:rPr lang="en-US" altLang="ko-KR" sz="1600" dirty="0" err="1">
-                          <a:solidFill>
-                            <a:schemeClr val="tx1"/>
-                          </a:solidFill>
-                        </a:rPr>
-                        <a:t>기후</a:t>
-                      </a:r>
-                      <a:r>
-                        <a:rPr lang="en-US" altLang="ko-KR" sz="1600" dirty="0">
-                          <a:solidFill>
-                            <a:schemeClr val="tx1"/>
-                          </a:solidFill>
-                        </a:rPr>
-                        <a:t> 학습 웹앱</a:t>
-                      </a:r>
-                      <a:endParaRPr lang="ko-KR" altLang="en-US" sz="1600" dirty="0">
+                      <a:endParaRPr lang="ko-KR" altLang="en-US" sz="1200" dirty="0">
                         <a:solidFill>
                           <a:schemeClr val="tx1"/>
                         </a:solidFill>
@@ -9657,7 +9602,7 @@
           <a:p>
             <a:fld id="{A159ACAC-1E46-4DC0-93AF-2BFFF527AE11}" type="slidenum">
               <a:rPr lang="ko-KR" altLang="en-US" smtClean="0"/>
-              <a:t>2</a:t>
+              <a:t>5</a:t>
             </a:fld>
             <a:endParaRPr lang="ko-KR" altLang="en-US"/>
           </a:p>
@@ -9680,7 +9625,7 @@
           <a:noFill/>
         </p:spPr>
         <p:txBody>
-          <a:bodyPr wrap="square" lIns="54864" tIns="27432" rIns="54864" bIns="27432" anchor="t">
+          <a:bodyPr wrap="square" anchor="t" lIns="54864" rIns="54864" tIns="27432" bIns="27432">
             <a:spAutoFit/>
           </a:bodyPr>
           <a:lstStyle/>
@@ -9738,9 +9683,7 @@
         <p:txBody>
           <a:bodyPr rtlCol="0" anchor="ctr"/>
           <a:lstStyle/>
-          <a:p>
-            <a:endParaRPr/>
-          </a:p>
+          <a:p/>
         </p:txBody>
       </p:sp>
       <p:sp>
@@ -9760,7 +9703,7 @@
           <a:noFill/>
         </p:spPr>
         <p:txBody>
-          <a:bodyPr wrap="square" lIns="54864" tIns="27432" rIns="54864" bIns="27432" anchor="t">
+          <a:bodyPr wrap="square" anchor="t" lIns="54864" rIns="54864" tIns="27432" bIns="27432">
             <a:spAutoFit/>
           </a:bodyPr>
           <a:lstStyle/>
@@ -9794,7 +9737,7 @@
           <a:noFill/>
         </p:spPr>
         <p:txBody>
-          <a:bodyPr wrap="square" lIns="54864" tIns="27432" rIns="54864" bIns="27432" anchor="t">
+          <a:bodyPr wrap="square" anchor="t" lIns="54864" rIns="54864" tIns="27432" bIns="27432">
             <a:spAutoFit/>
           </a:bodyPr>
           <a:lstStyle/>
@@ -9828,7 +9771,7 @@
           <a:noFill/>
         </p:spPr>
         <p:txBody>
-          <a:bodyPr wrap="square" lIns="54864" tIns="27432" rIns="54864" bIns="27432" anchor="t">
+          <a:bodyPr wrap="square" anchor="t" lIns="54864" rIns="54864" tIns="27432" bIns="27432">
             <a:spAutoFit/>
           </a:bodyPr>
           <a:lstStyle/>
@@ -9886,7 +9829,6 @@
           <a:lstStyle/>
           <a:p>
             <a:pPr algn="ctr"/>
-            <a:endParaRPr/>
           </a:p>
         </p:txBody>
       </p:sp>
@@ -9933,9 +9875,7 @@
         <p:txBody>
           <a:bodyPr rtlCol="0" anchor="ctr"/>
           <a:lstStyle/>
-          <a:p>
-            <a:endParaRPr/>
-          </a:p>
+          <a:p/>
         </p:txBody>
       </p:sp>
       <p:sp>
@@ -9955,7 +9895,7 @@
           <a:noFill/>
         </p:spPr>
         <p:txBody>
-          <a:bodyPr wrap="square" lIns="54864" tIns="27432" rIns="54864" bIns="27432" anchor="t">
+          <a:bodyPr wrap="square" anchor="t" lIns="54864" rIns="54864" tIns="27432" bIns="27432">
             <a:spAutoFit/>
           </a:bodyPr>
           <a:lstStyle/>
@@ -9989,7 +9929,7 @@
           <a:noFill/>
         </p:spPr>
         <p:txBody>
-          <a:bodyPr wrap="square" lIns="54864" tIns="27432" rIns="54864" bIns="27432" anchor="t">
+          <a:bodyPr wrap="square" anchor="t" lIns="54864" rIns="54864" tIns="27432" bIns="27432">
             <a:spAutoFit/>
           </a:bodyPr>
           <a:lstStyle/>
@@ -10023,7 +9963,7 @@
           <a:noFill/>
         </p:spPr>
         <p:txBody>
-          <a:bodyPr wrap="square" lIns="54864" tIns="27432" rIns="54864" bIns="27432" anchor="t">
+          <a:bodyPr wrap="square" anchor="t" lIns="54864" rIns="54864" tIns="27432" bIns="27432">
             <a:spAutoFit/>
           </a:bodyPr>
           <a:lstStyle/>
@@ -10081,7 +10021,6 @@
           <a:lstStyle/>
           <a:p>
             <a:pPr algn="ctr"/>
-            <a:endParaRPr/>
           </a:p>
         </p:txBody>
       </p:sp>
@@ -10128,9 +10067,7 @@
         <p:txBody>
           <a:bodyPr rtlCol="0" anchor="ctr"/>
           <a:lstStyle/>
-          <a:p>
-            <a:endParaRPr/>
-          </a:p>
+          <a:p/>
         </p:txBody>
       </p:sp>
       <p:sp>
@@ -10150,7 +10087,7 @@
           <a:noFill/>
         </p:spPr>
         <p:txBody>
-          <a:bodyPr wrap="square" lIns="54864" tIns="27432" rIns="54864" bIns="27432" anchor="t">
+          <a:bodyPr wrap="square" anchor="t" lIns="54864" rIns="54864" tIns="27432" bIns="27432">
             <a:spAutoFit/>
           </a:bodyPr>
           <a:lstStyle/>
@@ -10184,7 +10121,7 @@
           <a:noFill/>
         </p:spPr>
         <p:txBody>
-          <a:bodyPr wrap="square" lIns="54864" tIns="27432" rIns="54864" bIns="27432" anchor="t">
+          <a:bodyPr wrap="square" anchor="t" lIns="54864" rIns="54864" tIns="27432" bIns="27432">
             <a:spAutoFit/>
           </a:bodyPr>
           <a:lstStyle/>
@@ -10218,7 +10155,7 @@
           <a:noFill/>
         </p:spPr>
         <p:txBody>
-          <a:bodyPr wrap="square" lIns="54864" tIns="27432" rIns="54864" bIns="27432" anchor="t">
+          <a:bodyPr wrap="square" anchor="t" lIns="54864" rIns="54864" tIns="27432" bIns="27432">
             <a:spAutoFit/>
           </a:bodyPr>
           <a:lstStyle/>
@@ -10278,9 +10215,7 @@
         <p:txBody>
           <a:bodyPr rtlCol="0" anchor="ctr"/>
           <a:lstStyle/>
-          <a:p>
-            <a:endParaRPr/>
-          </a:p>
+          <a:p/>
         </p:txBody>
       </p:sp>
       <p:sp>
@@ -10300,7 +10235,7 @@
           <a:noFill/>
         </p:spPr>
         <p:txBody>
-          <a:bodyPr wrap="square" lIns="54864" tIns="27432" rIns="54864" bIns="27432" anchor="t">
+          <a:bodyPr wrap="square" anchor="t" lIns="54864" rIns="54864" tIns="27432" bIns="27432">
             <a:spAutoFit/>
           </a:bodyPr>
           <a:lstStyle/>
@@ -10334,7 +10269,7 @@
           <a:noFill/>
         </p:spPr>
         <p:txBody>
-          <a:bodyPr wrap="square" lIns="54864" tIns="27432" rIns="54864" bIns="27432" anchor="t">
+          <a:bodyPr wrap="square" anchor="t" lIns="54864" rIns="54864" tIns="27432" bIns="27432">
             <a:spAutoFit/>
           </a:bodyPr>
           <a:lstStyle/>
@@ -10394,9 +10329,7 @@
         <p:txBody>
           <a:bodyPr rtlCol="0" anchor="ctr"/>
           <a:lstStyle/>
-          <a:p>
-            <a:endParaRPr/>
-          </a:p>
+          <a:p/>
         </p:txBody>
       </p:sp>
       <p:sp>
@@ -10416,7 +10349,7 @@
           <a:noFill/>
         </p:spPr>
         <p:txBody>
-          <a:bodyPr wrap="square" lIns="54864" tIns="27432" rIns="54864" bIns="27432" anchor="t">
+          <a:bodyPr wrap="square" anchor="t" lIns="54864" rIns="54864" tIns="27432" bIns="27432">
             <a:spAutoFit/>
           </a:bodyPr>
           <a:lstStyle/>
@@ -10450,7 +10383,7 @@
           <a:noFill/>
         </p:spPr>
         <p:txBody>
-          <a:bodyPr wrap="square" lIns="54864" tIns="27432" rIns="54864" bIns="27432" anchor="t">
+          <a:bodyPr wrap="square" anchor="t" lIns="54864" rIns="54864" tIns="27432" bIns="27432">
             <a:spAutoFit/>
           </a:bodyPr>
           <a:lstStyle/>
@@ -10510,9 +10443,7 @@
         <p:txBody>
           <a:bodyPr rtlCol="0" anchor="ctr"/>
           <a:lstStyle/>
-          <a:p>
-            <a:endParaRPr/>
-          </a:p>
+          <a:p/>
         </p:txBody>
       </p:sp>
       <p:sp>
@@ -10532,7 +10463,7 @@
           <a:noFill/>
         </p:spPr>
         <p:txBody>
-          <a:bodyPr wrap="square" lIns="54864" tIns="27432" rIns="54864" bIns="27432" anchor="t">
+          <a:bodyPr wrap="square" anchor="t" lIns="54864" rIns="54864" tIns="27432" bIns="27432">
             <a:spAutoFit/>
           </a:bodyPr>
           <a:lstStyle/>
@@ -10566,7 +10497,7 @@
           <a:noFill/>
         </p:spPr>
         <p:txBody>
-          <a:bodyPr wrap="square" lIns="54864" tIns="27432" rIns="54864" bIns="27432" anchor="t">
+          <a:bodyPr wrap="square" anchor="t" lIns="54864" rIns="54864" tIns="27432" bIns="27432">
             <a:spAutoFit/>
           </a:bodyPr>
           <a:lstStyle/>
@@ -10626,9 +10557,7 @@
         <p:txBody>
           <a:bodyPr rtlCol="0" anchor="ctr"/>
           <a:lstStyle/>
-          <a:p>
-            <a:endParaRPr/>
-          </a:p>
+          <a:p/>
         </p:txBody>
       </p:sp>
       <p:sp>
@@ -10648,7 +10577,7 @@
           <a:noFill/>
         </p:spPr>
         <p:txBody>
-          <a:bodyPr wrap="square" lIns="54864" tIns="27432" rIns="54864" bIns="27432" anchor="t">
+          <a:bodyPr wrap="square" anchor="t" lIns="54864" rIns="54864" tIns="27432" bIns="27432">
             <a:spAutoFit/>
           </a:bodyPr>
           <a:lstStyle/>
@@ -10682,7 +10611,7 @@
           <a:noFill/>
         </p:spPr>
         <p:txBody>
-          <a:bodyPr wrap="square" lIns="54864" tIns="27432" rIns="54864" bIns="27432" anchor="t">
+          <a:bodyPr wrap="square" anchor="t" lIns="54864" rIns="54864" tIns="27432" bIns="27432">
             <a:spAutoFit/>
           </a:bodyPr>
           <a:lstStyle/>
@@ -10716,7 +10645,7 @@
           <a:noFill/>
         </p:spPr>
         <p:txBody>
-          <a:bodyPr wrap="square" lIns="54864" tIns="27432" rIns="54864" bIns="27432" anchor="t">
+          <a:bodyPr wrap="square" anchor="t" lIns="54864" rIns="54864" tIns="27432" bIns="27432">
             <a:spAutoFit/>
           </a:bodyPr>
           <a:lstStyle/>
@@ -10815,7 +10744,7 @@
           <a:p>
             <a:fld id="{A159ACAC-1E46-4DC0-93AF-2BFFF527AE11}" type="slidenum">
               <a:rPr lang="ko-KR" altLang="en-US" smtClean="0"/>
-              <a:t>3</a:t>
+              <a:t>6</a:t>
             </a:fld>
             <a:endParaRPr lang="ko-KR" altLang="en-US"/>
           </a:p>
@@ -10982,6 +10911,14 @@
               <a:buFont typeface="Arial" panose="020B0604020202020204" pitchFamily="34" charset="0"/>
               <a:buNone/>
             </a:pPr>
+            <a:r>
+              <a:rPr lang="ko-KR" altLang="en-US" sz="1200" dirty="0">
+                <a:solidFill>
+                  <a:schemeClr val="tx1"/>
+                </a:solidFill>
+              </a:rPr>
+              <a:t/>
+            </a:r>
             <a:endParaRPr lang="en-US" altLang="ko-KR" sz="1200" dirty="0">
               <a:solidFill>
                 <a:schemeClr val="tx1"/>
@@ -11115,9 +11052,7 @@
         <p:txBody>
           <a:bodyPr rtlCol="0" anchor="ctr"/>
           <a:lstStyle/>
-          <a:p>
-            <a:endParaRPr/>
-          </a:p>
+          <a:p/>
         </p:txBody>
       </p:sp>
       <p:sp>
@@ -11137,7 +11072,7 @@
           <a:noFill/>
         </p:spPr>
         <p:txBody>
-          <a:bodyPr wrap="square" lIns="54864" tIns="27432" rIns="54864" bIns="27432" anchor="t">
+          <a:bodyPr wrap="square" anchor="t" lIns="54864" rIns="54864" tIns="27432" bIns="27432">
             <a:spAutoFit/>
           </a:bodyPr>
           <a:lstStyle/>
@@ -11171,7 +11106,7 @@
           <a:noFill/>
         </p:spPr>
         <p:txBody>
-          <a:bodyPr wrap="square" lIns="54864" tIns="27432" rIns="54864" bIns="27432" anchor="t">
+          <a:bodyPr wrap="square" anchor="t" lIns="54864" rIns="54864" tIns="27432" bIns="27432">
             <a:spAutoFit/>
           </a:bodyPr>
           <a:lstStyle/>
@@ -11250,9 +11185,7 @@
         <p:txBody>
           <a:bodyPr rtlCol="0" anchor="ctr"/>
           <a:lstStyle/>
-          <a:p>
-            <a:endParaRPr/>
-          </a:p>
+          <a:p/>
         </p:txBody>
       </p:sp>
       <p:sp>
@@ -11272,7 +11205,7 @@
           <a:noFill/>
         </p:spPr>
         <p:txBody>
-          <a:bodyPr wrap="square" lIns="54864" tIns="27432" rIns="54864" bIns="27432" anchor="t">
+          <a:bodyPr wrap="square" anchor="t" lIns="54864" rIns="54864" tIns="27432" bIns="27432">
             <a:spAutoFit/>
           </a:bodyPr>
           <a:lstStyle/>
@@ -11306,7 +11239,7 @@
           <a:noFill/>
         </p:spPr>
         <p:txBody>
-          <a:bodyPr wrap="square" lIns="54864" tIns="27432" rIns="54864" bIns="27432" anchor="t">
+          <a:bodyPr wrap="square" anchor="t" lIns="54864" rIns="54864" tIns="27432" bIns="27432">
             <a:spAutoFit/>
           </a:bodyPr>
           <a:lstStyle/>
@@ -11385,9 +11318,7 @@
         <p:txBody>
           <a:bodyPr rtlCol="0" anchor="ctr"/>
           <a:lstStyle/>
-          <a:p>
-            <a:endParaRPr/>
-          </a:p>
+          <a:p/>
         </p:txBody>
       </p:sp>
       <p:sp>
@@ -11407,7 +11338,7 @@
           <a:noFill/>
         </p:spPr>
         <p:txBody>
-          <a:bodyPr wrap="square" lIns="54864" tIns="27432" rIns="54864" bIns="27432" anchor="t">
+          <a:bodyPr wrap="square" anchor="t" lIns="54864" rIns="54864" tIns="27432" bIns="27432">
             <a:spAutoFit/>
           </a:bodyPr>
           <a:lstStyle/>
@@ -11441,7 +11372,7 @@
           <a:noFill/>
         </p:spPr>
         <p:txBody>
-          <a:bodyPr wrap="square" lIns="54864" tIns="27432" rIns="54864" bIns="27432" anchor="t">
+          <a:bodyPr wrap="square" anchor="t" lIns="54864" rIns="54864" tIns="27432" bIns="27432">
             <a:spAutoFit/>
           </a:bodyPr>
           <a:lstStyle/>
@@ -11494,7 +11425,7 @@
           <a:noFill/>
         </p:spPr>
         <p:txBody>
-          <a:bodyPr wrap="square" lIns="54864" tIns="27432" rIns="54864" bIns="27432" anchor="t">
+          <a:bodyPr wrap="square" anchor="t" lIns="54864" rIns="54864" tIns="27432" bIns="27432">
             <a:spAutoFit/>
           </a:bodyPr>
           <a:lstStyle/>
@@ -11528,7 +11459,7 @@
           <a:noFill/>
         </p:spPr>
         <p:txBody>
-          <a:bodyPr wrap="square" lIns="54864" tIns="27432" rIns="54864" bIns="27432" anchor="t">
+          <a:bodyPr wrap="square" anchor="t" lIns="54864" rIns="54864" tIns="27432" bIns="27432">
             <a:spAutoFit/>
           </a:bodyPr>
           <a:lstStyle/>
@@ -11586,9 +11517,7 @@
         <p:txBody>
           <a:bodyPr rtlCol="0" anchor="ctr"/>
           <a:lstStyle/>
-          <a:p>
-            <a:endParaRPr/>
-          </a:p>
+          <a:p/>
         </p:txBody>
       </p:sp>
       <p:sp>
@@ -11608,7 +11537,7 @@
           <a:noFill/>
         </p:spPr>
         <p:txBody>
-          <a:bodyPr wrap="square" lIns="54864" tIns="27432" rIns="54864" bIns="27432" anchor="t">
+          <a:bodyPr wrap="square" anchor="t" lIns="54864" rIns="54864" tIns="27432" bIns="27432">
             <a:spAutoFit/>
           </a:bodyPr>
           <a:lstStyle/>
@@ -11642,7 +11571,7 @@
           <a:noFill/>
         </p:spPr>
         <p:txBody>
-          <a:bodyPr wrap="square" lIns="54864" tIns="27432" rIns="54864" bIns="27432" anchor="t">
+          <a:bodyPr wrap="square" anchor="t" lIns="54864" rIns="54864" tIns="27432" bIns="27432">
             <a:spAutoFit/>
           </a:bodyPr>
           <a:lstStyle/>
@@ -11676,7 +11605,7 @@
           <a:noFill/>
         </p:spPr>
         <p:txBody>
-          <a:bodyPr wrap="square" lIns="54864" tIns="27432" rIns="54864" bIns="27432" anchor="t">
+          <a:bodyPr wrap="square" anchor="t" lIns="54864" rIns="54864" tIns="27432" bIns="27432">
             <a:spAutoFit/>
           </a:bodyPr>
           <a:lstStyle/>
@@ -11734,7 +11663,6 @@
           <a:lstStyle/>
           <a:p>
             <a:pPr algn="ctr"/>
-            <a:endParaRPr/>
           </a:p>
         </p:txBody>
       </p:sp>
@@ -11781,9 +11709,7 @@
         <p:txBody>
           <a:bodyPr rtlCol="0" anchor="ctr"/>
           <a:lstStyle/>
-          <a:p>
-            <a:endParaRPr/>
-          </a:p>
+          <a:p/>
         </p:txBody>
       </p:sp>
       <p:sp>
@@ -11803,7 +11729,7 @@
           <a:noFill/>
         </p:spPr>
         <p:txBody>
-          <a:bodyPr wrap="square" lIns="54864" tIns="27432" rIns="54864" bIns="27432" anchor="t">
+          <a:bodyPr wrap="square" anchor="t" lIns="54864" rIns="54864" tIns="27432" bIns="27432">
             <a:spAutoFit/>
           </a:bodyPr>
           <a:lstStyle/>
@@ -11837,7 +11763,7 @@
           <a:noFill/>
         </p:spPr>
         <p:txBody>
-          <a:bodyPr wrap="square" lIns="54864" tIns="27432" rIns="54864" bIns="27432" anchor="t">
+          <a:bodyPr wrap="square" anchor="t" lIns="54864" rIns="54864" tIns="27432" bIns="27432">
             <a:spAutoFit/>
           </a:bodyPr>
           <a:lstStyle/>
@@ -11871,7 +11797,7 @@
           <a:noFill/>
         </p:spPr>
         <p:txBody>
-          <a:bodyPr wrap="square" lIns="54864" tIns="27432" rIns="54864" bIns="27432" anchor="t">
+          <a:bodyPr wrap="square" anchor="t" lIns="54864" rIns="54864" tIns="27432" bIns="27432">
             <a:spAutoFit/>
           </a:bodyPr>
           <a:lstStyle/>
@@ -11929,7 +11855,6 @@
           <a:lstStyle/>
           <a:p>
             <a:pPr algn="ctr"/>
-            <a:endParaRPr/>
           </a:p>
         </p:txBody>
       </p:sp>
@@ -11976,9 +11901,7 @@
         <p:txBody>
           <a:bodyPr rtlCol="0" anchor="ctr"/>
           <a:lstStyle/>
-          <a:p>
-            <a:endParaRPr/>
-          </a:p>
+          <a:p/>
         </p:txBody>
       </p:sp>
       <p:sp>
@@ -11998,7 +11921,7 @@
           <a:noFill/>
         </p:spPr>
         <p:txBody>
-          <a:bodyPr wrap="square" lIns="54864" tIns="27432" rIns="54864" bIns="27432" anchor="t">
+          <a:bodyPr wrap="square" anchor="t" lIns="54864" rIns="54864" tIns="27432" bIns="27432">
             <a:spAutoFit/>
           </a:bodyPr>
           <a:lstStyle/>
@@ -12032,7 +11955,7 @@
           <a:noFill/>
         </p:spPr>
         <p:txBody>
-          <a:bodyPr wrap="square" lIns="54864" tIns="27432" rIns="54864" bIns="27432" anchor="t">
+          <a:bodyPr wrap="square" anchor="t" lIns="54864" rIns="54864" tIns="27432" bIns="27432">
             <a:spAutoFit/>
           </a:bodyPr>
           <a:lstStyle/>
@@ -12066,7 +11989,7 @@
           <a:noFill/>
         </p:spPr>
         <p:txBody>
-          <a:bodyPr wrap="square" lIns="54864" tIns="27432" rIns="54864" bIns="27432" anchor="t">
+          <a:bodyPr wrap="square" anchor="t" lIns="54864" rIns="54864" tIns="27432" bIns="27432">
             <a:spAutoFit/>
           </a:bodyPr>
           <a:lstStyle/>
@@ -12124,7 +12047,6 @@
           <a:lstStyle/>
           <a:p>
             <a:pPr algn="ctr"/>
-            <a:endParaRPr/>
           </a:p>
         </p:txBody>
       </p:sp>
@@ -12171,9 +12093,7 @@
         <p:txBody>
           <a:bodyPr rtlCol="0" anchor="ctr"/>
           <a:lstStyle/>
-          <a:p>
-            <a:endParaRPr/>
-          </a:p>
+          <a:p/>
         </p:txBody>
       </p:sp>
       <p:sp>
@@ -12193,7 +12113,7 @@
           <a:noFill/>
         </p:spPr>
         <p:txBody>
-          <a:bodyPr wrap="square" lIns="54864" tIns="27432" rIns="54864" bIns="27432" anchor="t">
+          <a:bodyPr wrap="square" anchor="t" lIns="54864" rIns="54864" tIns="27432" bIns="27432">
             <a:spAutoFit/>
           </a:bodyPr>
           <a:lstStyle/>
@@ -12227,7 +12147,7 @@
           <a:noFill/>
         </p:spPr>
         <p:txBody>
-          <a:bodyPr wrap="square" lIns="54864" tIns="27432" rIns="54864" bIns="27432" anchor="t">
+          <a:bodyPr wrap="square" anchor="t" lIns="54864" rIns="54864" tIns="27432" bIns="27432">
             <a:spAutoFit/>
           </a:bodyPr>
           <a:lstStyle/>
@@ -12261,7 +12181,7 @@
           <a:noFill/>
         </p:spPr>
         <p:txBody>
-          <a:bodyPr wrap="square" lIns="54864" tIns="27432" rIns="54864" bIns="27432" anchor="t">
+          <a:bodyPr wrap="square" anchor="t" lIns="54864" rIns="54864" tIns="27432" bIns="27432">
             <a:spAutoFit/>
           </a:bodyPr>
           <a:lstStyle/>
@@ -12295,7 +12215,7 @@
           <a:noFill/>
         </p:spPr>
         <p:txBody>
-          <a:bodyPr wrap="square" lIns="54864" tIns="27432" rIns="54864" bIns="27432" anchor="t">
+          <a:bodyPr wrap="square" anchor="t" lIns="54864" rIns="54864" tIns="27432" bIns="27432">
             <a:spAutoFit/>
           </a:bodyPr>
           <a:lstStyle/>
@@ -12394,7 +12314,7 @@
           <a:p>
             <a:fld id="{A159ACAC-1E46-4DC0-93AF-2BFFF527AE11}" type="slidenum">
               <a:rPr lang="ko-KR" altLang="en-US" smtClean="0"/>
-              <a:t>4</a:t>
+              <a:t>7</a:t>
             </a:fld>
             <a:endParaRPr lang="ko-KR" altLang="en-US"/>
           </a:p>
@@ -12639,6 +12559,14 @@
               <a:buFont typeface="Arial" panose="020B0604020202020204" pitchFamily="34" charset="0"/>
               <a:buNone/>
             </a:pPr>
+            <a:r>
+              <a:rPr lang="ko-KR" altLang="en-US" sz="1200" dirty="0">
+                <a:solidFill>
+                  <a:schemeClr val="tx1"/>
+                </a:solidFill>
+              </a:rPr>
+              <a:t/>
+            </a:r>
             <a:endParaRPr lang="en-US" altLang="ko-KR" sz="1200" dirty="0">
               <a:solidFill>
                 <a:schemeClr val="tx1"/>
@@ -12775,7 +12703,7 @@
         </p:nvSpPr>
         <p:spPr>
           <a:xfrm>
-            <a:off x="6303264" y="1807302"/>
+            <a:off x="6303264" y="1801368"/>
             <a:ext cx="5125166" cy="4596706"/>
           </a:xfrm>
           <a:prstGeom prst="rect">
@@ -12939,7 +12867,7 @@
           <p:nvPr/>
         </p:nvPicPr>
         <p:blipFill>
-          <a:blip r:embed="rId3"/>
+          <a:blip r:embed="rId2"/>
           <a:stretch>
             <a:fillRect/>
           </a:stretch>
@@ -12976,7 +12904,7 @@
           <a:noFill/>
         </p:spPr>
         <p:txBody>
-          <a:bodyPr wrap="square" lIns="54864" tIns="27432" rIns="54864" bIns="27432" anchor="t">
+          <a:bodyPr wrap="square" anchor="t" lIns="54864" rIns="54864" tIns="27432" bIns="27432">
             <a:spAutoFit/>
           </a:bodyPr>
           <a:lstStyle/>
@@ -13059,7 +12987,7 @@
           <a:noFill/>
         </p:spPr>
         <p:txBody>
-          <a:bodyPr wrap="square" lIns="54864" tIns="27432" rIns="54864" bIns="27432" anchor="t">
+          <a:bodyPr wrap="square" anchor="t" lIns="54864" rIns="54864" tIns="27432" bIns="27432">
             <a:spAutoFit/>
           </a:bodyPr>
           <a:lstStyle/>
@@ -13084,8 +13012,8 @@
         </p:nvSpPr>
         <p:spPr>
           <a:xfrm>
-            <a:off x="6541008" y="2650356"/>
-            <a:ext cx="4649678" cy="745938"/>
+            <a:off x="6541008" y="2880360"/>
+            <a:ext cx="4649678" cy="603504"/>
           </a:xfrm>
           <a:prstGeom prst="roundRect">
             <a:avLst>
@@ -13119,9 +13047,7 @@
         <p:txBody>
           <a:bodyPr rtlCol="0" anchor="ctr"/>
           <a:lstStyle/>
-          <a:p>
-            <a:endParaRPr/>
-          </a:p>
+          <a:p/>
         </p:txBody>
       </p:sp>
       <p:sp>
@@ -13132,8 +13058,8 @@
         </p:nvSpPr>
         <p:spPr>
           <a:xfrm>
-            <a:off x="6541008" y="2650356"/>
-            <a:ext cx="50292" cy="745938"/>
+            <a:off x="6541008" y="2880360"/>
+            <a:ext cx="50292" cy="603504"/>
           </a:xfrm>
           <a:prstGeom prst="rect">
             <a:avLst/>
@@ -13165,7 +13091,6 @@
           <a:lstStyle/>
           <a:p>
             <a:pPr algn="ctr"/>
-            <a:endParaRPr/>
           </a:p>
         </p:txBody>
       </p:sp>
@@ -13177,7 +13102,7 @@
         </p:nvSpPr>
         <p:spPr>
           <a:xfrm>
-            <a:off x="6669024" y="2705220"/>
+            <a:off x="6669024" y="2935224"/>
             <a:ext cx="4430222" cy="201168"/>
           </a:xfrm>
           <a:prstGeom prst="rect">
@@ -13186,7 +13111,7 @@
           <a:noFill/>
         </p:spPr>
         <p:txBody>
-          <a:bodyPr wrap="square" lIns="54864" tIns="27432" rIns="54864" bIns="27432" anchor="t">
+          <a:bodyPr wrap="square" anchor="t" lIns="54864" rIns="54864" tIns="27432" bIns="27432">
             <a:spAutoFit/>
           </a:bodyPr>
           <a:lstStyle/>
@@ -13211,7 +13136,7 @@
         </p:nvSpPr>
         <p:spPr>
           <a:xfrm>
-            <a:off x="6669024" y="2924675"/>
+            <a:off x="6669024" y="3154679"/>
             <a:ext cx="4430222" cy="274320"/>
           </a:xfrm>
           <a:prstGeom prst="rect">
@@ -13220,7 +13145,7 @@
           <a:noFill/>
         </p:spPr>
         <p:txBody>
-          <a:bodyPr wrap="square" lIns="54864" tIns="27432" rIns="54864" bIns="27432" anchor="t">
+          <a:bodyPr wrap="square" anchor="t" lIns="54864" rIns="54864" tIns="27432" bIns="27432">
             <a:spAutoFit/>
           </a:bodyPr>
           <a:lstStyle/>
@@ -13264,8 +13189,8 @@
         </p:nvSpPr>
         <p:spPr>
           <a:xfrm>
-            <a:off x="6541008" y="3381875"/>
-            <a:ext cx="4649678" cy="1198021"/>
+            <a:off x="6541008" y="3611880"/>
+            <a:ext cx="4649678" cy="969264"/>
           </a:xfrm>
           <a:prstGeom prst="roundRect">
             <a:avLst>
@@ -13299,9 +13224,7 @@
         <p:txBody>
           <a:bodyPr rtlCol="0" anchor="ctr"/>
           <a:lstStyle/>
-          <a:p>
-            <a:endParaRPr/>
-          </a:p>
+          <a:p/>
         </p:txBody>
       </p:sp>
       <p:sp>
@@ -13312,8 +13235,8 @@
         </p:nvSpPr>
         <p:spPr>
           <a:xfrm>
-            <a:off x="6541008" y="3381875"/>
-            <a:ext cx="50292" cy="1198021"/>
+            <a:off x="6541008" y="3611880"/>
+            <a:ext cx="50292" cy="969264"/>
           </a:xfrm>
           <a:prstGeom prst="rect">
             <a:avLst/>
@@ -13345,7 +13268,6 @@
           <a:lstStyle/>
           <a:p>
             <a:pPr algn="ctr"/>
-            <a:endParaRPr/>
           </a:p>
         </p:txBody>
       </p:sp>
@@ -13357,7 +13279,7 @@
         </p:nvSpPr>
         <p:spPr>
           <a:xfrm>
-            <a:off x="6669024" y="3436740"/>
+            <a:off x="6669024" y="3666744"/>
             <a:ext cx="4430222" cy="201168"/>
           </a:xfrm>
           <a:prstGeom prst="rect">
@@ -13366,7 +13288,7 @@
           <a:noFill/>
         </p:spPr>
         <p:txBody>
-          <a:bodyPr wrap="square" lIns="54864" tIns="27432" rIns="54864" bIns="27432" anchor="t">
+          <a:bodyPr wrap="square" anchor="t" lIns="54864" rIns="54864" tIns="27432" bIns="27432">
             <a:spAutoFit/>
           </a:bodyPr>
           <a:lstStyle/>
@@ -13391,7 +13313,7 @@
         </p:nvSpPr>
         <p:spPr>
           <a:xfrm>
-            <a:off x="6669024" y="3656196"/>
+            <a:off x="6669024" y="3886200"/>
             <a:ext cx="4430222" cy="640080"/>
           </a:xfrm>
           <a:prstGeom prst="rect">
@@ -13400,7 +13322,7 @@
           <a:noFill/>
         </p:spPr>
         <p:txBody>
-          <a:bodyPr wrap="square" lIns="54864" tIns="27432" rIns="54864" bIns="27432" anchor="t">
+          <a:bodyPr wrap="square" anchor="t" lIns="54864" rIns="54864" tIns="27432" bIns="27432">
             <a:spAutoFit/>
           </a:bodyPr>
           <a:lstStyle/>
@@ -13474,8 +13396,8 @@
         </p:nvSpPr>
         <p:spPr>
           <a:xfrm>
-            <a:off x="6541008" y="4479155"/>
-            <a:ext cx="4649678" cy="1491875"/>
+            <a:off x="6541008" y="4709160"/>
+            <a:ext cx="4649678" cy="1207008"/>
           </a:xfrm>
           <a:prstGeom prst="roundRect">
             <a:avLst>
@@ -13509,9 +13431,7 @@
         <p:txBody>
           <a:bodyPr rtlCol="0" anchor="ctr"/>
           <a:lstStyle/>
-          <a:p>
-            <a:endParaRPr/>
-          </a:p>
+          <a:p/>
         </p:txBody>
       </p:sp>
       <p:sp>
@@ -13522,8 +13442,8 @@
         </p:nvSpPr>
         <p:spPr>
           <a:xfrm>
-            <a:off x="6541008" y="4479155"/>
-            <a:ext cx="50292" cy="1491875"/>
+            <a:off x="6541008" y="4709160"/>
+            <a:ext cx="50292" cy="1207008"/>
           </a:xfrm>
           <a:prstGeom prst="rect">
             <a:avLst/>
@@ -13555,7 +13475,6 @@
           <a:lstStyle/>
           <a:p>
             <a:pPr algn="ctr"/>
-            <a:endParaRPr/>
           </a:p>
         </p:txBody>
       </p:sp>
@@ -13567,7 +13486,7 @@
         </p:nvSpPr>
         <p:spPr>
           <a:xfrm>
-            <a:off x="6669024" y="4534020"/>
+            <a:off x="6669024" y="4764024"/>
             <a:ext cx="4430222" cy="201168"/>
           </a:xfrm>
           <a:prstGeom prst="rect">
@@ -13576,7 +13495,7 @@
           <a:noFill/>
         </p:spPr>
         <p:txBody>
-          <a:bodyPr wrap="square" lIns="54864" tIns="27432" rIns="54864" bIns="27432" anchor="t">
+          <a:bodyPr wrap="square" anchor="t" lIns="54864" rIns="54864" tIns="27432" bIns="27432">
             <a:spAutoFit/>
           </a:bodyPr>
           <a:lstStyle/>
@@ -13601,7 +13520,7 @@
         </p:nvSpPr>
         <p:spPr>
           <a:xfrm>
-            <a:off x="6669024" y="4753476"/>
+            <a:off x="6669024" y="4983480"/>
             <a:ext cx="4430222" cy="877824"/>
           </a:xfrm>
           <a:prstGeom prst="rect">
@@ -13610,7 +13529,7 @@
           <a:noFill/>
         </p:spPr>
         <p:txBody>
-          <a:bodyPr wrap="square" lIns="54864" tIns="27432" rIns="54864" bIns="27432" anchor="t">
+          <a:bodyPr wrap="square" anchor="t" lIns="54864" rIns="54864" tIns="27432" bIns="27432">
             <a:spAutoFit/>
           </a:bodyPr>
           <a:lstStyle/>
@@ -13693,7 +13612,7 @@
           <a:noFill/>
         </p:spPr>
         <p:txBody>
-          <a:bodyPr wrap="square" lIns="54864" tIns="27432" rIns="54864" bIns="27432" anchor="t">
+          <a:bodyPr wrap="square" anchor="t" lIns="54864" rIns="54864" tIns="27432" bIns="27432">
             <a:spAutoFit/>
           </a:bodyPr>
           <a:lstStyle/>
@@ -13792,7 +13711,7 @@
           <a:p>
             <a:fld id="{A159ACAC-1E46-4DC0-93AF-2BFFF527AE11}" type="slidenum">
               <a:rPr lang="ko-KR" altLang="en-US" smtClean="0"/>
-              <a:t>5</a:t>
+              <a:t>8</a:t>
             </a:fld>
             <a:endParaRPr lang="ko-KR" altLang="en-US"/>
           </a:p>
@@ -14237,9 +14156,7 @@
         <p:txBody>
           <a:bodyPr rtlCol="0" anchor="ctr"/>
           <a:lstStyle/>
-          <a:p>
-            <a:endParaRPr/>
-          </a:p>
+          <a:p/>
         </p:txBody>
       </p:sp>
       <p:sp>
@@ -14259,7 +14176,7 @@
           <a:noFill/>
         </p:spPr>
         <p:txBody>
-          <a:bodyPr wrap="square" lIns="54864" tIns="27432" rIns="54864" bIns="27432" anchor="t">
+          <a:bodyPr wrap="square" anchor="t" lIns="54864" rIns="54864" tIns="27432" bIns="27432">
             <a:spAutoFit/>
           </a:bodyPr>
           <a:lstStyle/>
@@ -14293,7 +14210,7 @@
           <a:noFill/>
         </p:spPr>
         <p:txBody>
-          <a:bodyPr wrap="square" lIns="54864" tIns="27432" rIns="54864" bIns="27432" anchor="t">
+          <a:bodyPr wrap="square" anchor="t" lIns="54864" rIns="54864" tIns="27432" bIns="27432">
             <a:spAutoFit/>
           </a:bodyPr>
           <a:lstStyle/>
@@ -14351,9 +14268,7 @@
         <p:txBody>
           <a:bodyPr rtlCol="0" anchor="ctr"/>
           <a:lstStyle/>
-          <a:p>
-            <a:endParaRPr/>
-          </a:p>
+          <a:p/>
         </p:txBody>
       </p:sp>
       <p:sp>
@@ -14373,7 +14288,7 @@
           <a:noFill/>
         </p:spPr>
         <p:txBody>
-          <a:bodyPr wrap="square" lIns="54864" tIns="27432" rIns="54864" bIns="27432" anchor="t">
+          <a:bodyPr wrap="square" anchor="t" lIns="54864" rIns="54864" tIns="27432" bIns="27432">
             <a:spAutoFit/>
           </a:bodyPr>
           <a:lstStyle/>
@@ -14407,7 +14322,7 @@
           <a:noFill/>
         </p:spPr>
         <p:txBody>
-          <a:bodyPr wrap="square" lIns="54864" tIns="27432" rIns="54864" bIns="27432" anchor="t">
+          <a:bodyPr wrap="square" anchor="t" lIns="54864" rIns="54864" tIns="27432" bIns="27432">
             <a:spAutoFit/>
           </a:bodyPr>
           <a:lstStyle/>
@@ -14467,9 +14382,7 @@
         <p:txBody>
           <a:bodyPr rtlCol="0" anchor="ctr"/>
           <a:lstStyle/>
-          <a:p>
-            <a:endParaRPr/>
-          </a:p>
+          <a:p/>
         </p:txBody>
       </p:sp>
       <p:sp>
@@ -14489,7 +14402,7 @@
           <a:noFill/>
         </p:spPr>
         <p:txBody>
-          <a:bodyPr wrap="square" lIns="54864" tIns="27432" rIns="54864" bIns="27432" anchor="t">
+          <a:bodyPr wrap="square" anchor="t" lIns="54864" rIns="54864" tIns="27432" bIns="27432">
             <a:spAutoFit/>
           </a:bodyPr>
           <a:lstStyle/>
@@ -14523,7 +14436,7 @@
           <a:noFill/>
         </p:spPr>
         <p:txBody>
-          <a:bodyPr wrap="square" lIns="54864" tIns="27432" rIns="54864" bIns="27432" anchor="t">
+          <a:bodyPr wrap="square" anchor="t" lIns="54864" rIns="54864" tIns="27432" bIns="27432">
             <a:spAutoFit/>
           </a:bodyPr>
           <a:lstStyle/>
@@ -14583,9 +14496,7 @@
         <p:txBody>
           <a:bodyPr rtlCol="0" anchor="ctr"/>
           <a:lstStyle/>
-          <a:p>
-            <a:endParaRPr/>
-          </a:p>
+          <a:p/>
         </p:txBody>
       </p:sp>
       <p:sp>
@@ -14605,7 +14516,7 @@
           <a:noFill/>
         </p:spPr>
         <p:txBody>
-          <a:bodyPr wrap="square" lIns="54864" tIns="27432" rIns="54864" bIns="27432" anchor="t">
+          <a:bodyPr wrap="square" anchor="t" lIns="54864" rIns="54864" tIns="27432" bIns="27432">
             <a:spAutoFit/>
           </a:bodyPr>
           <a:lstStyle/>
@@ -14639,7 +14550,7 @@
           <a:noFill/>
         </p:spPr>
         <p:txBody>
-          <a:bodyPr wrap="square" lIns="54864" tIns="27432" rIns="54864" bIns="27432" anchor="t">
+          <a:bodyPr wrap="square" anchor="t" lIns="54864" rIns="54864" tIns="27432" bIns="27432">
             <a:spAutoFit/>
           </a:bodyPr>
           <a:lstStyle/>
@@ -14673,7 +14584,7 @@
           <a:noFill/>
         </p:spPr>
         <p:txBody>
-          <a:bodyPr vert="vert270" wrap="square" lIns="54864" tIns="27432" rIns="54864" bIns="27432" anchor="ctr">
+          <a:bodyPr wrap="square" anchor="ctr" vert="vert270" lIns="54864" rIns="54864" tIns="27432" bIns="27432">
             <a:spAutoFit/>
           </a:bodyPr>
           <a:lstStyle/>
@@ -14707,7 +14618,7 @@
           <a:noFill/>
         </p:spPr>
         <p:txBody>
-          <a:bodyPr wrap="square" lIns="54864" tIns="27432" rIns="54864" bIns="27432" anchor="t">
+          <a:bodyPr wrap="square" anchor="t" lIns="54864" rIns="54864" tIns="27432" bIns="27432">
             <a:spAutoFit/>
           </a:bodyPr>
           <a:lstStyle/>
@@ -14741,7 +14652,7 @@
           <a:noFill/>
         </p:spPr>
         <p:txBody>
-          <a:bodyPr wrap="square" lIns="54864" tIns="27432" rIns="54864" bIns="27432" anchor="t">
+          <a:bodyPr wrap="square" anchor="t" lIns="54864" rIns="54864" tIns="27432" bIns="27432">
             <a:spAutoFit/>
           </a:bodyPr>
           <a:lstStyle/>
@@ -14775,7 +14686,7 @@
           <a:noFill/>
         </p:spPr>
         <p:txBody>
-          <a:bodyPr wrap="square" lIns="54864" tIns="27432" rIns="54864" bIns="27432" anchor="t">
+          <a:bodyPr wrap="square" anchor="t" lIns="54864" rIns="54864" tIns="27432" bIns="27432">
             <a:spAutoFit/>
           </a:bodyPr>
           <a:lstStyle/>
@@ -14846,9 +14757,7 @@
         <p:txBody>
           <a:bodyPr rtlCol="0" anchor="ctr"/>
           <a:lstStyle/>
-          <a:p>
-            <a:endParaRPr/>
-          </a:p>
+          <a:p/>
         </p:txBody>
       </p:sp>
       <p:sp>
@@ -14892,7 +14801,6 @@
           <a:lstStyle/>
           <a:p>
             <a:pPr algn="ctr"/>
-            <a:endParaRPr/>
           </a:p>
         </p:txBody>
       </p:sp>
@@ -14913,7 +14821,7 @@
           <a:noFill/>
         </p:spPr>
         <p:txBody>
-          <a:bodyPr wrap="square" lIns="54864" tIns="27432" rIns="54864" bIns="27432" anchor="t">
+          <a:bodyPr wrap="square" anchor="t" lIns="54864" rIns="54864" tIns="27432" bIns="27432">
             <a:spAutoFit/>
           </a:bodyPr>
           <a:lstStyle/>
@@ -14947,7 +14855,7 @@
           <a:noFill/>
         </p:spPr>
         <p:txBody>
-          <a:bodyPr wrap="square" lIns="54864" tIns="27432" rIns="54864" bIns="27432" anchor="t">
+          <a:bodyPr wrap="square" anchor="t" lIns="54864" rIns="54864" tIns="27432" bIns="27432">
             <a:spAutoFit/>
           </a:bodyPr>
           <a:lstStyle/>
@@ -15011,9 +14919,7 @@
         <p:txBody>
           <a:bodyPr rtlCol="0" anchor="ctr"/>
           <a:lstStyle/>
-          <a:p>
-            <a:endParaRPr/>
-          </a:p>
+          <a:p/>
         </p:txBody>
       </p:sp>
       <p:sp>
@@ -15057,7 +14963,6 @@
           <a:lstStyle/>
           <a:p>
             <a:pPr algn="ctr"/>
-            <a:endParaRPr/>
           </a:p>
         </p:txBody>
       </p:sp>
@@ -15078,7 +14983,7 @@
           <a:noFill/>
         </p:spPr>
         <p:txBody>
-          <a:bodyPr wrap="square" lIns="54864" tIns="27432" rIns="54864" bIns="27432" anchor="t">
+          <a:bodyPr wrap="square" anchor="t" lIns="54864" rIns="54864" tIns="27432" bIns="27432">
             <a:spAutoFit/>
           </a:bodyPr>
           <a:lstStyle/>
@@ -15112,7 +15017,7 @@
           <a:noFill/>
         </p:spPr>
         <p:txBody>
-          <a:bodyPr wrap="square" lIns="54864" tIns="27432" rIns="54864" bIns="27432" anchor="t">
+          <a:bodyPr wrap="square" anchor="t" lIns="54864" rIns="54864" tIns="27432" bIns="27432">
             <a:spAutoFit/>
           </a:bodyPr>
           <a:lstStyle/>
@@ -15176,9 +15081,7 @@
         <p:txBody>
           <a:bodyPr rtlCol="0" anchor="ctr"/>
           <a:lstStyle/>
-          <a:p>
-            <a:endParaRPr/>
-          </a:p>
+          <a:p/>
         </p:txBody>
       </p:sp>
       <p:sp>
@@ -15222,7 +15125,6 @@
           <a:lstStyle/>
           <a:p>
             <a:pPr algn="ctr"/>
-            <a:endParaRPr/>
           </a:p>
         </p:txBody>
       </p:sp>
@@ -15243,7 +15145,7 @@
           <a:noFill/>
         </p:spPr>
         <p:txBody>
-          <a:bodyPr wrap="square" lIns="54864" tIns="27432" rIns="54864" bIns="27432" anchor="t">
+          <a:bodyPr wrap="square" anchor="t" lIns="54864" rIns="54864" tIns="27432" bIns="27432">
             <a:spAutoFit/>
           </a:bodyPr>
           <a:lstStyle/>
@@ -15277,7 +15179,7 @@
           <a:noFill/>
         </p:spPr>
         <p:txBody>
-          <a:bodyPr wrap="square" lIns="54864" tIns="27432" rIns="54864" bIns="27432" anchor="t">
+          <a:bodyPr wrap="square" anchor="t" lIns="54864" rIns="54864" tIns="27432" bIns="27432">
             <a:spAutoFit/>
           </a:bodyPr>
           <a:lstStyle/>
@@ -15341,9 +15243,7 @@
         <p:txBody>
           <a:bodyPr rtlCol="0" anchor="ctr"/>
           <a:lstStyle/>
-          <a:p>
-            <a:endParaRPr/>
-          </a:p>
+          <a:p/>
         </p:txBody>
       </p:sp>
       <p:sp>
@@ -15387,7 +15287,6 @@
           <a:lstStyle/>
           <a:p>
             <a:pPr algn="ctr"/>
-            <a:endParaRPr/>
           </a:p>
         </p:txBody>
       </p:sp>
@@ -15408,7 +15307,7 @@
           <a:noFill/>
         </p:spPr>
         <p:txBody>
-          <a:bodyPr wrap="square" lIns="54864" tIns="27432" rIns="54864" bIns="27432" anchor="t">
+          <a:bodyPr wrap="square" anchor="t" lIns="54864" rIns="54864" tIns="27432" bIns="27432">
             <a:spAutoFit/>
           </a:bodyPr>
           <a:lstStyle/>
@@ -15442,7 +15341,7 @@
           <a:noFill/>
         </p:spPr>
         <p:txBody>
-          <a:bodyPr wrap="square" lIns="54864" tIns="27432" rIns="54864" bIns="27432" anchor="t">
+          <a:bodyPr wrap="square" anchor="t" lIns="54864" rIns="54864" tIns="27432" bIns="27432">
             <a:spAutoFit/>
           </a:bodyPr>
           <a:lstStyle/>
@@ -15506,9 +15405,7 @@
         <p:txBody>
           <a:bodyPr rtlCol="0" anchor="ctr"/>
           <a:lstStyle/>
-          <a:p>
-            <a:endParaRPr/>
-          </a:p>
+          <a:p/>
         </p:txBody>
       </p:sp>
       <p:sp>
@@ -15552,7 +15449,6 @@
           <a:lstStyle/>
           <a:p>
             <a:pPr algn="ctr"/>
-            <a:endParaRPr/>
           </a:p>
         </p:txBody>
       </p:sp>
@@ -15573,7 +15469,7 @@
           <a:noFill/>
         </p:spPr>
         <p:txBody>
-          <a:bodyPr wrap="square" lIns="54864" tIns="27432" rIns="54864" bIns="27432" anchor="t">
+          <a:bodyPr wrap="square" anchor="t" lIns="54864" rIns="54864" tIns="27432" bIns="27432">
             <a:spAutoFit/>
           </a:bodyPr>
           <a:lstStyle/>
@@ -15607,7 +15503,7 @@
           <a:noFill/>
         </p:spPr>
         <p:txBody>
-          <a:bodyPr wrap="square" lIns="54864" tIns="27432" rIns="54864" bIns="27432" anchor="t">
+          <a:bodyPr wrap="square" anchor="t" lIns="54864" rIns="54864" tIns="27432" bIns="27432">
             <a:spAutoFit/>
           </a:bodyPr>
           <a:lstStyle/>
@@ -15645,7 +15541,7 @@
           <a:noFill/>
         </p:spPr>
         <p:txBody>
-          <a:bodyPr wrap="square" lIns="54864" tIns="27432" rIns="54864" bIns="27432" anchor="t">
+          <a:bodyPr wrap="square" anchor="t" lIns="54864" rIns="54864" tIns="27432" bIns="27432">
             <a:spAutoFit/>
           </a:bodyPr>
           <a:lstStyle/>
@@ -15744,7 +15640,7 @@
           <a:p>
             <a:fld id="{A159ACAC-1E46-4DC0-93AF-2BFFF527AE11}" type="slidenum">
               <a:rPr lang="ko-KR" altLang="en-US" smtClean="0"/>
-              <a:t>6</a:t>
+              <a:t>9</a:t>
             </a:fld>
             <a:endParaRPr lang="ko-KR" altLang="en-US"/>
           </a:p>
@@ -16174,27 +16070,9 @@
                 <a:tableStyleId>{5C22544A-7EE6-4342-B048-85BDC9FD1C3A}</a:tableStyleId>
               </a:tblPr>
               <a:tblGrid>
-                <a:gridCol w="1574276">
-                  <a:extLst>
-                    <a:ext uri="{9D8B030D-6E8A-4147-A177-3AD203B41FA5}">
-                      <a16:colId xmlns:a16="http://schemas.microsoft.com/office/drawing/2014/main" val="20000"/>
-                    </a:ext>
-                  </a:extLst>
-                </a:gridCol>
-                <a:gridCol w="1574276">
-                  <a:extLst>
-                    <a:ext uri="{9D8B030D-6E8A-4147-A177-3AD203B41FA5}">
-                      <a16:colId xmlns:a16="http://schemas.microsoft.com/office/drawing/2014/main" val="20001"/>
-                    </a:ext>
-                  </a:extLst>
-                </a:gridCol>
-                <a:gridCol w="1574276">
-                  <a:extLst>
-                    <a:ext uri="{9D8B030D-6E8A-4147-A177-3AD203B41FA5}">
-                      <a16:colId xmlns:a16="http://schemas.microsoft.com/office/drawing/2014/main" val="20002"/>
-                    </a:ext>
-                  </a:extLst>
-                </a:gridCol>
+                <a:gridCol w="1574276"/>
+                <a:gridCol w="1574276"/>
+                <a:gridCol w="1574276"/>
               </a:tblGrid>
               <a:tr h="274320">
                 <a:tc>
@@ -16263,11 +16141,6 @@
                     </a:solidFill>
                   </a:tcPr>
                 </a:tc>
-                <a:extLst>
-                  <a:ext uri="{0D108BD9-81ED-4DB2-BD59-A6C34878D82A}">
-                    <a16:rowId xmlns:a16="http://schemas.microsoft.com/office/drawing/2014/main" val="10000"/>
-                  </a:ext>
-                </a:extLst>
               </a:tr>
               <a:tr h="246888">
                 <a:tc>
@@ -16336,11 +16209,6 @@
                     </a:solidFill>
                   </a:tcPr>
                 </a:tc>
-                <a:extLst>
-                  <a:ext uri="{0D108BD9-81ED-4DB2-BD59-A6C34878D82A}">
-                    <a16:rowId xmlns:a16="http://schemas.microsoft.com/office/drawing/2014/main" val="10001"/>
-                  </a:ext>
-                </a:extLst>
               </a:tr>
               <a:tr h="246888">
                 <a:tc>
@@ -16409,11 +16277,6 @@
                     </a:solidFill>
                   </a:tcPr>
                 </a:tc>
-                <a:extLst>
-                  <a:ext uri="{0D108BD9-81ED-4DB2-BD59-A6C34878D82A}">
-                    <a16:rowId xmlns:a16="http://schemas.microsoft.com/office/drawing/2014/main" val="10002"/>
-                  </a:ext>
-                </a:extLst>
               </a:tr>
               <a:tr h="246888">
                 <a:tc>
@@ -16482,11 +16345,6 @@
                     </a:solidFill>
                   </a:tcPr>
                 </a:tc>
-                <a:extLst>
-                  <a:ext uri="{0D108BD9-81ED-4DB2-BD59-A6C34878D82A}">
-                    <a16:rowId xmlns:a16="http://schemas.microsoft.com/office/drawing/2014/main" val="10003"/>
-                  </a:ext>
-                </a:extLst>
               </a:tr>
               <a:tr h="246888">
                 <a:tc>
@@ -16555,11 +16413,6 @@
                     </a:solidFill>
                   </a:tcPr>
                 </a:tc>
-                <a:extLst>
-                  <a:ext uri="{0D108BD9-81ED-4DB2-BD59-A6C34878D82A}">
-                    <a16:rowId xmlns:a16="http://schemas.microsoft.com/office/drawing/2014/main" val="10004"/>
-                  </a:ext>
-                </a:extLst>
               </a:tr>
               <a:tr h="246888">
                 <a:tc>
@@ -16628,11 +16481,6 @@
                     </a:solidFill>
                   </a:tcPr>
                 </a:tc>
-                <a:extLst>
-                  <a:ext uri="{0D108BD9-81ED-4DB2-BD59-A6C34878D82A}">
-                    <a16:rowId xmlns:a16="http://schemas.microsoft.com/office/drawing/2014/main" val="10005"/>
-                  </a:ext>
-                </a:extLst>
               </a:tr>
             </a:tbl>
           </a:graphicData>
@@ -16655,7 +16503,7 @@
           <a:noFill/>
         </p:spPr>
         <p:txBody>
-          <a:bodyPr wrap="square" lIns="54864" tIns="27432" rIns="54864" bIns="27432" anchor="t">
+          <a:bodyPr wrap="square" anchor="t" lIns="54864" rIns="54864" tIns="27432" bIns="27432">
             <a:spAutoFit/>
           </a:bodyPr>
           <a:lstStyle/>
@@ -16689,7 +16537,7 @@
           <a:noFill/>
         </p:spPr>
         <p:txBody>
-          <a:bodyPr wrap="square" lIns="54864" tIns="27432" rIns="54864" bIns="27432" anchor="t">
+          <a:bodyPr wrap="square" anchor="t" lIns="54864" rIns="54864" tIns="27432" bIns="27432">
             <a:spAutoFit/>
           </a:bodyPr>
           <a:lstStyle/>
@@ -16748,7 +16596,7 @@
           <p:nvPr/>
         </p:nvPicPr>
         <p:blipFill>
-          <a:blip r:embed="rId3"/>
+          <a:blip r:embed="rId2"/>
           <a:stretch>
             <a:fillRect/>
           </a:stretch>
@@ -16785,7 +16633,7 @@
           <a:noFill/>
         </p:spPr>
         <p:txBody>
-          <a:bodyPr wrap="square" lIns="54864" tIns="27432" rIns="54864" bIns="27432" anchor="t">
+          <a:bodyPr wrap="square" anchor="t" lIns="54864" rIns="54864" tIns="27432" bIns="27432">
             <a:spAutoFit/>
           </a:bodyPr>
           <a:lstStyle/>
@@ -16884,7 +16732,7 @@
           <a:p>
             <a:fld id="{A159ACAC-1E46-4DC0-93AF-2BFFF527AE11}" type="slidenum">
               <a:rPr lang="ko-KR" altLang="en-US" smtClean="0"/>
-              <a:t>7</a:t>
+              <a:t>10</a:t>
             </a:fld>
             <a:endParaRPr lang="ko-KR" altLang="en-US"/>
           </a:p>
@@ -17092,9 +16940,7 @@
         <p:txBody>
           <a:bodyPr rtlCol="0" anchor="ctr"/>
           <a:lstStyle/>
-          <a:p>
-            <a:endParaRPr/>
-          </a:p>
+          <a:p/>
         </p:txBody>
       </p:sp>
       <p:sp>
@@ -17114,7 +16960,7 @@
           <a:noFill/>
         </p:spPr>
         <p:txBody>
-          <a:bodyPr wrap="square" lIns="54864" tIns="27432" rIns="54864" bIns="27432" anchor="t">
+          <a:bodyPr wrap="square" anchor="t" lIns="54864" rIns="54864" tIns="27432" bIns="27432">
             <a:spAutoFit/>
           </a:bodyPr>
           <a:lstStyle/>
@@ -17148,7 +16994,7 @@
           <a:noFill/>
         </p:spPr>
         <p:txBody>
-          <a:bodyPr wrap="square" lIns="54864" tIns="27432" rIns="54864" bIns="27432" anchor="t">
+          <a:bodyPr wrap="square" anchor="t" lIns="54864" rIns="54864" tIns="27432" bIns="27432">
             <a:spAutoFit/>
           </a:bodyPr>
           <a:lstStyle/>
@@ -17208,9 +17054,7 @@
         <p:txBody>
           <a:bodyPr rtlCol="0" anchor="ctr"/>
           <a:lstStyle/>
-          <a:p>
-            <a:endParaRPr/>
-          </a:p>
+          <a:p/>
         </p:txBody>
       </p:sp>
       <p:sp>
@@ -17230,7 +17074,7 @@
           <a:noFill/>
         </p:spPr>
         <p:txBody>
-          <a:bodyPr wrap="square" lIns="54864" tIns="27432" rIns="54864" bIns="27432" anchor="t">
+          <a:bodyPr wrap="square" anchor="t" lIns="54864" rIns="54864" tIns="27432" bIns="27432">
             <a:spAutoFit/>
           </a:bodyPr>
           <a:lstStyle/>
@@ -17264,7 +17108,7 @@
           <a:noFill/>
         </p:spPr>
         <p:txBody>
-          <a:bodyPr wrap="square" lIns="54864" tIns="27432" rIns="54864" bIns="27432" anchor="t">
+          <a:bodyPr wrap="square" anchor="t" lIns="54864" rIns="54864" tIns="27432" bIns="27432">
             <a:spAutoFit/>
           </a:bodyPr>
           <a:lstStyle/>
@@ -17324,9 +17168,7 @@
         <p:txBody>
           <a:bodyPr rtlCol="0" anchor="ctr"/>
           <a:lstStyle/>
-          <a:p>
-            <a:endParaRPr/>
-          </a:p>
+          <a:p/>
         </p:txBody>
       </p:sp>
       <p:sp>
@@ -17346,7 +17188,7 @@
           <a:noFill/>
         </p:spPr>
         <p:txBody>
-          <a:bodyPr wrap="square" lIns="54864" tIns="27432" rIns="54864" bIns="27432" anchor="t">
+          <a:bodyPr wrap="square" anchor="t" lIns="54864" rIns="54864" tIns="27432" bIns="27432">
             <a:spAutoFit/>
           </a:bodyPr>
           <a:lstStyle/>
@@ -17380,7 +17222,7 @@
           <a:noFill/>
         </p:spPr>
         <p:txBody>
-          <a:bodyPr wrap="square" lIns="54864" tIns="27432" rIns="54864" bIns="27432" anchor="t">
+          <a:bodyPr wrap="square" anchor="t" lIns="54864" rIns="54864" tIns="27432" bIns="27432">
             <a:spAutoFit/>
           </a:bodyPr>
           <a:lstStyle/>
@@ -17440,9 +17282,7 @@
         <p:txBody>
           <a:bodyPr rtlCol="0" anchor="ctr"/>
           <a:lstStyle/>
-          <a:p>
-            <a:endParaRPr/>
-          </a:p>
+          <a:p/>
         </p:txBody>
       </p:sp>
       <p:sp>
@@ -17462,7 +17302,7 @@
           <a:noFill/>
         </p:spPr>
         <p:txBody>
-          <a:bodyPr wrap="square" lIns="54864" tIns="27432" rIns="54864" bIns="27432" anchor="t">
+          <a:bodyPr wrap="square" anchor="t" lIns="54864" rIns="54864" tIns="27432" bIns="27432">
             <a:spAutoFit/>
           </a:bodyPr>
           <a:lstStyle/>
@@ -17496,7 +17336,7 @@
           <a:noFill/>
         </p:spPr>
         <p:txBody>
-          <a:bodyPr wrap="square" lIns="54864" tIns="27432" rIns="54864" bIns="27432" anchor="t">
+          <a:bodyPr wrap="square" anchor="t" lIns="54864" rIns="54864" tIns="27432" bIns="27432">
             <a:spAutoFit/>
           </a:bodyPr>
           <a:lstStyle/>
@@ -17556,9 +17396,7 @@
         <p:txBody>
           <a:bodyPr rtlCol="0" anchor="ctr"/>
           <a:lstStyle/>
-          <a:p>
-            <a:endParaRPr/>
-          </a:p>
+          <a:p/>
         </p:txBody>
       </p:sp>
       <p:sp>
@@ -17578,7 +17416,7 @@
           <a:noFill/>
         </p:spPr>
         <p:txBody>
-          <a:bodyPr wrap="square" lIns="54864" tIns="27432" rIns="54864" bIns="27432" anchor="t">
+          <a:bodyPr wrap="square" anchor="t" lIns="54864" rIns="54864" tIns="27432" bIns="27432">
             <a:spAutoFit/>
           </a:bodyPr>
           <a:lstStyle/>
@@ -17612,7 +17450,7 @@
           <a:noFill/>
         </p:spPr>
         <p:txBody>
-          <a:bodyPr wrap="square" lIns="54864" tIns="27432" rIns="54864" bIns="27432" anchor="t">
+          <a:bodyPr wrap="square" anchor="t" lIns="54864" rIns="54864" tIns="27432" bIns="27432">
             <a:spAutoFit/>
           </a:bodyPr>
           <a:lstStyle/>
@@ -17672,9 +17510,7 @@
         <p:txBody>
           <a:bodyPr rtlCol="0" anchor="ctr"/>
           <a:lstStyle/>
-          <a:p>
-            <a:endParaRPr/>
-          </a:p>
+          <a:p/>
         </p:txBody>
       </p:sp>
       <p:sp>
@@ -17694,7 +17530,7 @@
           <a:noFill/>
         </p:spPr>
         <p:txBody>
-          <a:bodyPr wrap="square" lIns="54864" tIns="27432" rIns="54864" bIns="27432" anchor="t">
+          <a:bodyPr wrap="square" anchor="t" lIns="54864" rIns="54864" tIns="27432" bIns="27432">
             <a:spAutoFit/>
           </a:bodyPr>
           <a:lstStyle/>
@@ -17728,7 +17564,7 @@
           <a:noFill/>
         </p:spPr>
         <p:txBody>
-          <a:bodyPr wrap="square" lIns="54864" tIns="27432" rIns="54864" bIns="27432" anchor="t">
+          <a:bodyPr wrap="square" anchor="t" lIns="54864" rIns="54864" tIns="27432" bIns="27432">
             <a:spAutoFit/>
           </a:bodyPr>
           <a:lstStyle/>
@@ -17762,7 +17598,7 @@
           <a:noFill/>
         </p:spPr>
         <p:txBody>
-          <a:bodyPr wrap="square" lIns="54864" tIns="27432" rIns="54864" bIns="27432" anchor="t">
+          <a:bodyPr wrap="square" anchor="t" lIns="54864" rIns="54864" tIns="27432" bIns="27432">
             <a:spAutoFit/>
           </a:bodyPr>
           <a:lstStyle/>
@@ -17822,9 +17658,7 @@
         <p:txBody>
           <a:bodyPr rtlCol="0" anchor="ctr"/>
           <a:lstStyle/>
-          <a:p>
-            <a:endParaRPr/>
-          </a:p>
+          <a:p/>
         </p:txBody>
       </p:sp>
       <p:sp>
@@ -17868,7 +17702,6 @@
           <a:lstStyle/>
           <a:p>
             <a:pPr algn="ctr"/>
-            <a:endParaRPr/>
           </a:p>
         </p:txBody>
       </p:sp>
@@ -17889,7 +17722,7 @@
           <a:noFill/>
         </p:spPr>
         <p:txBody>
-          <a:bodyPr wrap="square" lIns="54864" tIns="27432" rIns="54864" bIns="27432" anchor="t">
+          <a:bodyPr wrap="square" anchor="t" lIns="54864" rIns="54864" tIns="27432" bIns="27432">
             <a:spAutoFit/>
           </a:bodyPr>
           <a:lstStyle/>
@@ -17923,7 +17756,7 @@
           <a:noFill/>
         </p:spPr>
         <p:txBody>
-          <a:bodyPr wrap="square" lIns="54864" tIns="27432" rIns="54864" bIns="27432" anchor="t">
+          <a:bodyPr wrap="square" anchor="t" lIns="54864" rIns="54864" tIns="27432" bIns="27432">
             <a:spAutoFit/>
           </a:bodyPr>
           <a:lstStyle/>
@@ -18002,9 +17835,7 @@
         <p:txBody>
           <a:bodyPr rtlCol="0" anchor="ctr"/>
           <a:lstStyle/>
-          <a:p>
-            <a:endParaRPr/>
-          </a:p>
+          <a:p/>
         </p:txBody>
       </p:sp>
       <p:sp>
@@ -18048,7 +17879,6 @@
           <a:lstStyle/>
           <a:p>
             <a:pPr algn="ctr"/>
-            <a:endParaRPr/>
           </a:p>
         </p:txBody>
       </p:sp>
@@ -18069,7 +17899,7 @@
           <a:noFill/>
         </p:spPr>
         <p:txBody>
-          <a:bodyPr wrap="square" lIns="54864" tIns="27432" rIns="54864" bIns="27432" anchor="t">
+          <a:bodyPr wrap="square" anchor="t" lIns="54864" rIns="54864" tIns="27432" bIns="27432">
             <a:spAutoFit/>
           </a:bodyPr>
           <a:lstStyle/>
@@ -18103,7 +17933,7 @@
           <a:noFill/>
         </p:spPr>
         <p:txBody>
-          <a:bodyPr wrap="square" lIns="54864" tIns="27432" rIns="54864" bIns="27432" anchor="t">
+          <a:bodyPr wrap="square" anchor="t" lIns="54864" rIns="54864" tIns="27432" bIns="27432">
             <a:spAutoFit/>
           </a:bodyPr>
           <a:lstStyle/>
@@ -18182,9 +18012,7 @@
         <p:txBody>
           <a:bodyPr rtlCol="0" anchor="ctr"/>
           <a:lstStyle/>
-          <a:p>
-            <a:endParaRPr/>
-          </a:p>
+          <a:p/>
         </p:txBody>
       </p:sp>
       <p:sp>
@@ -18228,7 +18056,6 @@
           <a:lstStyle/>
           <a:p>
             <a:pPr algn="ctr"/>
-            <a:endParaRPr/>
           </a:p>
         </p:txBody>
       </p:sp>
@@ -18249,7 +18076,7 @@
           <a:noFill/>
         </p:spPr>
         <p:txBody>
-          <a:bodyPr wrap="square" lIns="54864" tIns="27432" rIns="54864" bIns="27432" anchor="t">
+          <a:bodyPr wrap="square" anchor="t" lIns="54864" rIns="54864" tIns="27432" bIns="27432">
             <a:spAutoFit/>
           </a:bodyPr>
           <a:lstStyle/>
@@ -18283,7 +18110,7 @@
           <a:noFill/>
         </p:spPr>
         <p:txBody>
-          <a:bodyPr wrap="square" lIns="54864" tIns="27432" rIns="54864" bIns="27432" anchor="t">
+          <a:bodyPr wrap="square" anchor="t" lIns="54864" rIns="54864" tIns="27432" bIns="27432">
             <a:spAutoFit/>
           </a:bodyPr>
           <a:lstStyle/>
@@ -18362,9 +18189,7 @@
         <p:txBody>
           <a:bodyPr rtlCol="0" anchor="ctr"/>
           <a:lstStyle/>
-          <a:p>
-            <a:endParaRPr/>
-          </a:p>
+          <a:p/>
         </p:txBody>
       </p:sp>
       <p:sp>
@@ -18408,7 +18233,6 @@
           <a:lstStyle/>
           <a:p>
             <a:pPr algn="ctr"/>
-            <a:endParaRPr/>
           </a:p>
         </p:txBody>
       </p:sp>
@@ -18429,7 +18253,7 @@
           <a:noFill/>
         </p:spPr>
         <p:txBody>
-          <a:bodyPr wrap="square" lIns="54864" tIns="27432" rIns="54864" bIns="27432" anchor="t">
+          <a:bodyPr wrap="square" anchor="t" lIns="54864" rIns="54864" tIns="27432" bIns="27432">
             <a:spAutoFit/>
           </a:bodyPr>
           <a:lstStyle/>
@@ -18463,7 +18287,7 @@
           <a:noFill/>
         </p:spPr>
         <p:txBody>
-          <a:bodyPr wrap="square" lIns="54864" tIns="27432" rIns="54864" bIns="27432" anchor="t">
+          <a:bodyPr wrap="square" anchor="t" lIns="54864" rIns="54864" tIns="27432" bIns="27432">
             <a:spAutoFit/>
           </a:bodyPr>
           <a:lstStyle/>
@@ -18542,9 +18366,7 @@
         <p:txBody>
           <a:bodyPr rtlCol="0" anchor="ctr"/>
           <a:lstStyle/>
-          <a:p>
-            <a:endParaRPr/>
-          </a:p>
+          <a:p/>
         </p:txBody>
       </p:sp>
       <p:sp>
@@ -18588,7 +18410,6 @@
           <a:lstStyle/>
           <a:p>
             <a:pPr algn="ctr"/>
-            <a:endParaRPr/>
           </a:p>
         </p:txBody>
       </p:sp>
@@ -18609,7 +18430,7 @@
           <a:noFill/>
         </p:spPr>
         <p:txBody>
-          <a:bodyPr wrap="square" lIns="54864" tIns="27432" rIns="54864" bIns="27432" anchor="t">
+          <a:bodyPr wrap="square" anchor="t" lIns="54864" rIns="54864" tIns="27432" bIns="27432">
             <a:spAutoFit/>
           </a:bodyPr>
           <a:lstStyle/>
@@ -18643,7 +18464,7 @@
           <a:noFill/>
         </p:spPr>
         <p:txBody>
-          <a:bodyPr wrap="square" lIns="54864" tIns="27432" rIns="54864" bIns="27432" anchor="t">
+          <a:bodyPr wrap="square" anchor="t" lIns="54864" rIns="54864" tIns="27432" bIns="27432">
             <a:spAutoFit/>
           </a:bodyPr>
           <a:lstStyle/>
@@ -18722,9 +18543,7 @@
         <p:txBody>
           <a:bodyPr rtlCol="0" anchor="ctr"/>
           <a:lstStyle/>
-          <a:p>
-            <a:endParaRPr/>
-          </a:p>
+          <a:p/>
         </p:txBody>
       </p:sp>
       <p:sp>
@@ -18768,7 +18587,6 @@
           <a:lstStyle/>
           <a:p>
             <a:pPr algn="ctr"/>
-            <a:endParaRPr/>
           </a:p>
         </p:txBody>
       </p:sp>
@@ -18789,7 +18607,7 @@
           <a:noFill/>
         </p:spPr>
         <p:txBody>
-          <a:bodyPr wrap="square" lIns="54864" tIns="27432" rIns="54864" bIns="27432" anchor="t">
+          <a:bodyPr wrap="square" anchor="t" lIns="54864" rIns="54864" tIns="27432" bIns="27432">
             <a:spAutoFit/>
           </a:bodyPr>
           <a:lstStyle/>
@@ -18823,7 +18641,7 @@
           <a:noFill/>
         </p:spPr>
         <p:txBody>
-          <a:bodyPr wrap="square" lIns="54864" tIns="27432" rIns="54864" bIns="27432" anchor="t">
+          <a:bodyPr wrap="square" anchor="t" lIns="54864" rIns="54864" tIns="27432" bIns="27432">
             <a:spAutoFit/>
           </a:bodyPr>
           <a:lstStyle/>
@@ -18876,7 +18694,7 @@
           <a:noFill/>
         </p:spPr>
         <p:txBody>
-          <a:bodyPr wrap="square" lIns="54864" tIns="27432" rIns="54864" bIns="27432" anchor="t">
+          <a:bodyPr wrap="square" anchor="t" lIns="54864" rIns="54864" tIns="27432" bIns="27432">
             <a:spAutoFit/>
           </a:bodyPr>
           <a:lstStyle/>
@@ -18910,7 +18728,7 @@
           <a:noFill/>
         </p:spPr>
         <p:txBody>
-          <a:bodyPr wrap="square" lIns="54864" tIns="27432" rIns="54864" bIns="27432" anchor="t">
+          <a:bodyPr wrap="square" anchor="t" lIns="54864" rIns="54864" tIns="27432" bIns="27432">
             <a:spAutoFit/>
           </a:bodyPr>
           <a:lstStyle/>
@@ -19009,7 +18827,7 @@
           <a:p>
             <a:fld id="{A159ACAC-1E46-4DC0-93AF-2BFFF527AE11}" type="slidenum">
               <a:rPr lang="ko-KR" altLang="en-US" smtClean="0"/>
-              <a:t>8</a:t>
+              <a:t>11</a:t>
             </a:fld>
             <a:endParaRPr lang="ko-KR" altLang="en-US"/>
           </a:p>
@@ -19442,7 +19260,7 @@
           <p:nvPr/>
         </p:nvPicPr>
         <p:blipFill>
-          <a:blip r:embed="rId3"/>
+          <a:blip r:embed="rId2"/>
           <a:stretch>
             <a:fillRect/>
           </a:stretch>
@@ -19479,7 +19297,7 @@
           <a:noFill/>
         </p:spPr>
         <p:txBody>
-          <a:bodyPr wrap="square" lIns="54864" tIns="27432" rIns="54864" bIns="27432" anchor="t">
+          <a:bodyPr wrap="square" anchor="t" lIns="54864" rIns="54864" tIns="27432" bIns="27432">
             <a:spAutoFit/>
           </a:bodyPr>
           <a:lstStyle/>
@@ -19539,9 +19357,7 @@
         <p:txBody>
           <a:bodyPr rtlCol="0" anchor="ctr"/>
           <a:lstStyle/>
-          <a:p>
-            <a:endParaRPr/>
-          </a:p>
+          <a:p/>
         </p:txBody>
       </p:sp>
       <p:sp>
@@ -19561,7 +19377,7 @@
           <a:noFill/>
         </p:spPr>
         <p:txBody>
-          <a:bodyPr wrap="square" lIns="54864" tIns="27432" rIns="54864" bIns="27432" anchor="t">
+          <a:bodyPr wrap="square" anchor="t" lIns="54864" rIns="54864" tIns="27432" bIns="27432">
             <a:spAutoFit/>
           </a:bodyPr>
           <a:lstStyle/>
@@ -19595,7 +19411,7 @@
           <a:noFill/>
         </p:spPr>
         <p:txBody>
-          <a:bodyPr wrap="square" lIns="54864" tIns="27432" rIns="54864" bIns="27432" anchor="t">
+          <a:bodyPr wrap="square" anchor="t" lIns="54864" rIns="54864" tIns="27432" bIns="27432">
             <a:spAutoFit/>
           </a:bodyPr>
           <a:lstStyle/>
@@ -19655,9 +19471,7 @@
         <p:txBody>
           <a:bodyPr rtlCol="0" anchor="ctr"/>
           <a:lstStyle/>
-          <a:p>
-            <a:endParaRPr/>
-          </a:p>
+          <a:p/>
         </p:txBody>
       </p:sp>
       <p:sp>
@@ -19677,7 +19491,7 @@
           <a:noFill/>
         </p:spPr>
         <p:txBody>
-          <a:bodyPr wrap="square" lIns="54864" tIns="27432" rIns="54864" bIns="27432" anchor="t">
+          <a:bodyPr wrap="square" anchor="t" lIns="54864" rIns="54864" tIns="27432" bIns="27432">
             <a:spAutoFit/>
           </a:bodyPr>
           <a:lstStyle/>
@@ -19711,7 +19525,7 @@
           <a:noFill/>
         </p:spPr>
         <p:txBody>
-          <a:bodyPr wrap="square" lIns="54864" tIns="27432" rIns="54864" bIns="27432" anchor="t">
+          <a:bodyPr wrap="square" anchor="t" lIns="54864" rIns="54864" tIns="27432" bIns="27432">
             <a:spAutoFit/>
           </a:bodyPr>
           <a:lstStyle/>
@@ -19771,9 +19585,7 @@
         <p:txBody>
           <a:bodyPr rtlCol="0" anchor="ctr"/>
           <a:lstStyle/>
-          <a:p>
-            <a:endParaRPr/>
-          </a:p>
+          <a:p/>
         </p:txBody>
       </p:sp>
       <p:sp>
@@ -19793,7 +19605,7 @@
           <a:noFill/>
         </p:spPr>
         <p:txBody>
-          <a:bodyPr wrap="square" lIns="54864" tIns="27432" rIns="54864" bIns="27432" anchor="t">
+          <a:bodyPr wrap="square" anchor="t" lIns="54864" rIns="54864" tIns="27432" bIns="27432">
             <a:spAutoFit/>
           </a:bodyPr>
           <a:lstStyle/>
@@ -19827,7 +19639,7 @@
           <a:noFill/>
         </p:spPr>
         <p:txBody>
-          <a:bodyPr wrap="square" lIns="54864" tIns="27432" rIns="54864" bIns="27432" anchor="t">
+          <a:bodyPr wrap="square" anchor="t" lIns="54864" rIns="54864" tIns="27432" bIns="27432">
             <a:spAutoFit/>
           </a:bodyPr>
           <a:lstStyle/>
@@ -19887,9 +19699,7 @@
         <p:txBody>
           <a:bodyPr rtlCol="0" anchor="ctr"/>
           <a:lstStyle/>
-          <a:p>
-            <a:endParaRPr/>
-          </a:p>
+          <a:p/>
         </p:txBody>
       </p:sp>
       <p:sp>
@@ -19909,7 +19719,7 @@
           <a:noFill/>
         </p:spPr>
         <p:txBody>
-          <a:bodyPr wrap="square" lIns="54864" tIns="27432" rIns="54864" bIns="27432" anchor="t">
+          <a:bodyPr wrap="square" anchor="t" lIns="54864" rIns="54864" tIns="27432" bIns="27432">
             <a:spAutoFit/>
           </a:bodyPr>
           <a:lstStyle/>
@@ -19943,7 +19753,7 @@
           <a:noFill/>
         </p:spPr>
         <p:txBody>
-          <a:bodyPr wrap="square" lIns="54864" tIns="27432" rIns="54864" bIns="27432" anchor="t">
+          <a:bodyPr wrap="square" anchor="t" lIns="54864" rIns="54864" tIns="27432" bIns="27432">
             <a:spAutoFit/>
           </a:bodyPr>
           <a:lstStyle/>
@@ -19968,8 +19778,8 @@
         </p:nvSpPr>
         <p:spPr>
           <a:xfrm>
-            <a:off x="6541008" y="2127073"/>
-            <a:ext cx="4649678" cy="776352"/>
+            <a:off x="6541008" y="2368296"/>
+            <a:ext cx="4649678" cy="566928"/>
           </a:xfrm>
           <a:prstGeom prst="roundRect">
             <a:avLst>
@@ -20003,9 +19813,7 @@
         <p:txBody>
           <a:bodyPr rtlCol="0" anchor="ctr"/>
           <a:lstStyle/>
-          <a:p>
-            <a:endParaRPr/>
-          </a:p>
+          <a:p/>
         </p:txBody>
       </p:sp>
       <p:sp>
@@ -20016,8 +19824,8 @@
         </p:nvSpPr>
         <p:spPr>
           <a:xfrm>
-            <a:off x="6541008" y="2127073"/>
-            <a:ext cx="50292" cy="776352"/>
+            <a:off x="6541008" y="2368296"/>
+            <a:ext cx="50292" cy="566928"/>
           </a:xfrm>
           <a:prstGeom prst="rect">
             <a:avLst/>
@@ -20049,7 +19857,6 @@
           <a:lstStyle/>
           <a:p>
             <a:pPr algn="ctr"/>
-            <a:endParaRPr/>
           </a:p>
         </p:txBody>
       </p:sp>
@@ -20061,7 +19868,7 @@
         </p:nvSpPr>
         <p:spPr>
           <a:xfrm>
-            <a:off x="6669024" y="2181937"/>
+            <a:off x="6669024" y="2423160"/>
             <a:ext cx="4430222" cy="201168"/>
           </a:xfrm>
           <a:prstGeom prst="rect">
@@ -20070,7 +19877,7 @@
           <a:noFill/>
         </p:spPr>
         <p:txBody>
-          <a:bodyPr wrap="square" lIns="54864" tIns="27432" rIns="54864" bIns="27432" anchor="t">
+          <a:bodyPr wrap="square" anchor="t" lIns="54864" rIns="54864" tIns="27432" bIns="27432">
             <a:spAutoFit/>
           </a:bodyPr>
           <a:lstStyle/>
@@ -20095,7 +19902,7 @@
         </p:nvSpPr>
         <p:spPr>
           <a:xfrm>
-            <a:off x="6669024" y="2401392"/>
+            <a:off x="6669024" y="2642615"/>
             <a:ext cx="4430222" cy="237744"/>
           </a:xfrm>
           <a:prstGeom prst="rect">
@@ -20104,7 +19911,7 @@
           <a:noFill/>
         </p:spPr>
         <p:txBody>
-          <a:bodyPr wrap="square" lIns="54864" tIns="27432" rIns="54864" bIns="27432" anchor="t">
+          <a:bodyPr wrap="square" anchor="t" lIns="54864" rIns="54864" tIns="27432" bIns="27432">
             <a:spAutoFit/>
           </a:bodyPr>
           <a:lstStyle/>
@@ -20148,8 +19955,8 @@
         </p:nvSpPr>
         <p:spPr>
           <a:xfrm>
-            <a:off x="6541008" y="2840305"/>
-            <a:ext cx="4649678" cy="1277224"/>
+            <a:off x="6541008" y="3081528"/>
+            <a:ext cx="4649678" cy="932688"/>
           </a:xfrm>
           <a:prstGeom prst="roundRect">
             <a:avLst>
@@ -20183,9 +19990,7 @@
         <p:txBody>
           <a:bodyPr rtlCol="0" anchor="ctr"/>
           <a:lstStyle/>
-          <a:p>
-            <a:endParaRPr/>
-          </a:p>
+          <a:p/>
         </p:txBody>
       </p:sp>
       <p:sp>
@@ -20196,8 +20001,8 @@
         </p:nvSpPr>
         <p:spPr>
           <a:xfrm>
-            <a:off x="6541008" y="2840305"/>
-            <a:ext cx="50292" cy="1277224"/>
+            <a:off x="6541008" y="3081528"/>
+            <a:ext cx="50292" cy="932688"/>
           </a:xfrm>
           <a:prstGeom prst="rect">
             <a:avLst/>
@@ -20229,7 +20034,6 @@
           <a:lstStyle/>
           <a:p>
             <a:pPr algn="ctr"/>
-            <a:endParaRPr/>
           </a:p>
         </p:txBody>
       </p:sp>
@@ -20241,7 +20045,7 @@
         </p:nvSpPr>
         <p:spPr>
           <a:xfrm>
-            <a:off x="6669024" y="2895169"/>
+            <a:off x="6669024" y="3136392"/>
             <a:ext cx="4430222" cy="201168"/>
           </a:xfrm>
           <a:prstGeom prst="rect">
@@ -20250,7 +20054,7 @@
           <a:noFill/>
         </p:spPr>
         <p:txBody>
-          <a:bodyPr wrap="square" lIns="54864" tIns="27432" rIns="54864" bIns="27432" anchor="t">
+          <a:bodyPr wrap="square" anchor="t" lIns="54864" rIns="54864" tIns="27432" bIns="27432">
             <a:spAutoFit/>
           </a:bodyPr>
           <a:lstStyle/>
@@ -20275,7 +20079,7 @@
         </p:nvSpPr>
         <p:spPr>
           <a:xfrm>
-            <a:off x="6669024" y="3114625"/>
+            <a:off x="6669024" y="3355848"/>
             <a:ext cx="4430222" cy="603504"/>
           </a:xfrm>
           <a:prstGeom prst="rect">
@@ -20284,7 +20088,7 @@
           <a:noFill/>
         </p:spPr>
         <p:txBody>
-          <a:bodyPr wrap="square" lIns="54864" tIns="27432" rIns="54864" bIns="27432" anchor="t">
+          <a:bodyPr wrap="square" anchor="t" lIns="54864" rIns="54864" tIns="27432" bIns="27432">
             <a:spAutoFit/>
           </a:bodyPr>
           <a:lstStyle/>
@@ -20367,7 +20171,7 @@
           <a:noFill/>
         </p:spPr>
         <p:txBody>
-          <a:bodyPr wrap="square" lIns="54864" tIns="27432" rIns="54864" bIns="27432" anchor="t">
+          <a:bodyPr wrap="square" anchor="t" lIns="54864" rIns="54864" tIns="27432" bIns="27432">
             <a:spAutoFit/>
           </a:bodyPr>
           <a:lstStyle/>
@@ -20412,7 +20216,7 @@
           <a:noFill/>
         </p:spPr>
         <p:txBody>
-          <a:bodyPr wrap="square" lIns="54864" tIns="27432" rIns="54864" bIns="27432" anchor="t">
+          <a:bodyPr wrap="square" anchor="t" lIns="54864" rIns="54864" tIns="27432" bIns="27432">
             <a:spAutoFit/>
           </a:bodyPr>
           <a:lstStyle/>
@@ -20472,9 +20276,7 @@
         <p:txBody>
           <a:bodyPr rtlCol="0" anchor="ctr"/>
           <a:lstStyle/>
-          <a:p>
-            <a:endParaRPr/>
-          </a:p>
+          <a:p/>
         </p:txBody>
       </p:sp>
       <p:sp>
@@ -20494,7 +20296,7 @@
           <a:noFill/>
         </p:spPr>
         <p:txBody>
-          <a:bodyPr wrap="square" lIns="54864" tIns="27432" rIns="54864" bIns="27432" anchor="t">
+          <a:bodyPr wrap="square" anchor="t" lIns="54864" rIns="54864" tIns="27432" bIns="27432">
             <a:spAutoFit/>
           </a:bodyPr>
           <a:lstStyle/>
@@ -20528,7 +20330,7 @@
           <a:noFill/>
         </p:spPr>
         <p:txBody>
-          <a:bodyPr wrap="square" lIns="54864" tIns="27432" rIns="54864" bIns="27432" anchor="t">
+          <a:bodyPr wrap="square" anchor="t" lIns="54864" rIns="54864" tIns="27432" bIns="27432">
             <a:spAutoFit/>
           </a:bodyPr>
           <a:lstStyle/>
@@ -20588,9 +20390,7 @@
         <p:txBody>
           <a:bodyPr rtlCol="0" anchor="ctr"/>
           <a:lstStyle/>
-          <a:p>
-            <a:endParaRPr/>
-          </a:p>
+          <a:p/>
         </p:txBody>
       </p:sp>
       <p:sp>
@@ -20610,7 +20410,7 @@
           <a:noFill/>
         </p:spPr>
         <p:txBody>
-          <a:bodyPr wrap="square" lIns="54864" tIns="27432" rIns="54864" bIns="27432" anchor="t">
+          <a:bodyPr wrap="square" anchor="t" lIns="54864" rIns="54864" tIns="27432" bIns="27432">
             <a:spAutoFit/>
           </a:bodyPr>
           <a:lstStyle/>
@@ -20644,7 +20444,7 @@
           <a:noFill/>
         </p:spPr>
         <p:txBody>
-          <a:bodyPr wrap="square" lIns="54864" tIns="27432" rIns="54864" bIns="27432" anchor="t">
+          <a:bodyPr wrap="square" anchor="t" lIns="54864" rIns="54864" tIns="27432" bIns="27432">
             <a:spAutoFit/>
           </a:bodyPr>
           <a:lstStyle/>
@@ -20704,9 +20504,7 @@
         <p:txBody>
           <a:bodyPr rtlCol="0" anchor="ctr"/>
           <a:lstStyle/>
-          <a:p>
-            <a:endParaRPr/>
-          </a:p>
+          <a:p/>
         </p:txBody>
       </p:sp>
       <p:sp>
@@ -20726,7 +20524,7 @@
           <a:noFill/>
         </p:spPr>
         <p:txBody>
-          <a:bodyPr wrap="square" lIns="54864" tIns="27432" rIns="54864" bIns="27432" anchor="t">
+          <a:bodyPr wrap="square" anchor="t" lIns="54864" rIns="54864" tIns="27432" bIns="27432">
             <a:spAutoFit/>
           </a:bodyPr>
           <a:lstStyle/>
@@ -20760,7 +20558,7 @@
           <a:noFill/>
         </p:spPr>
         <p:txBody>
-          <a:bodyPr wrap="square" lIns="54864" tIns="27432" rIns="54864" bIns="27432" anchor="t">
+          <a:bodyPr wrap="square" anchor="t" lIns="54864" rIns="54864" tIns="27432" bIns="27432">
             <a:spAutoFit/>
           </a:bodyPr>
           <a:lstStyle/>
@@ -20794,7 +20592,7 @@
           <a:noFill/>
         </p:spPr>
         <p:txBody>
-          <a:bodyPr wrap="square" lIns="54864" tIns="27432" rIns="54864" bIns="27432" anchor="t">
+          <a:bodyPr wrap="square" anchor="t" lIns="54864" rIns="54864" tIns="27432" bIns="27432">
             <a:spAutoFit/>
           </a:bodyPr>
           <a:lstStyle/>

--- a/발표자료_Weather24_신동준.pptx
+++ b/발표자료_Weather24_신동준.pptx
@@ -1730,12 +1730,12 @@
           <a:p/>
           <a:p>
             <a:r>
-              <a:t>【5:30–6:05】 오답에 정답을 주지 않는다</a:t>
-            </a:r>
-          </a:p>
-          <a:p>
-            <a:r>
-              <a:t>〔‘내 결론 저장하고 이해 확인 →’ → 일부러 틀린 보기를 고른다〕</a:t>
+              <a:t>【5:30–6:00】 오답에 정답을 주지 않는다</a:t>
+            </a:r>
+          </a:p>
+          <a:p>
+            <a:r>
+              <a:t>〔`내 결론 저장하고 이해 확인 →` → 일부러 틀린 보기를 고른다〕</a:t>
             </a:r>
           </a:p>
           <a:p>
@@ -1750,12 +1750,7 @@
           </a:p>
           <a:p>
             <a:r>
-              <a:t>“1차 오답에 정답을 바로 고지하면 형성평가가 아니라 채점입니다.</a:t>
-            </a:r>
-          </a:p>
-          <a:p>
-            <a:r>
-              <a:t> 몇 번째 시도에 맞혔는지는 기록에 남습니다.”</a:t>
+              <a:t>“1차 오답에 정답을 바로 고지하면 형성평가가 아니라 채점입니다.”</a:t>
             </a:r>
           </a:p>
           <a:p>
@@ -1771,32 +1766,129 @@
           <a:p/>
           <a:p>
             <a:r>
-              <a:t>【6:05–6:50】 AI 해커톤의 AI — 결론을 대신 쓰지 않는다</a:t>
-            </a:r>
-          </a:p>
-          <a:p>
-            <a:r>
-              <a:t>〔‘내 결론 점검하고 마치기 →’ · 들어가는 즉시 기기 안 점검이 1회 자동 실행된다〕</a:t>
-            </a:r>
-          </a:p>
-          <a:p>
-            <a:r>
-              <a:t>“기본 점검은 외부 전송이 없고, 건너뛸 수 있는 선택이 아니라 필수 경로입니다.”</a:t>
-            </a:r>
-          </a:p>
-          <a:p>
-            <a:r>
-              <a:t>〔동의 체크박스를 짚고 체크 → ‘✦ 외부 AI 점검 요청’〕</a:t>
-            </a:r>
-          </a:p>
-          <a:p>
-            <a:r>
-              <a:t>“외부 AI는 전송 범위를 읽고 동의해야만 열립니다. 이름·학교·연락처는 쓰지 않게 합니다.”</a:t>
-            </a:r>
-          </a:p>
-          <a:p>
-            <a:r>
-              <a:t>〔응답 3~5초. 과장된 결론을 미리 넣어 두면 지역 확대와 인과 단정을 둘 다 잡는다〕</a:t>
+              <a:t>【6:00–6:45】 데이터 뷰어가 아니라는 답 — 앱이 강제하는 관문</a:t>
+            </a:r>
+          </a:p>
+          <a:p>
+            <a:r>
+              <a:t>〔이 화면의 주 버튼이 ‘🔬 열관성 실험실로 확인하기 →’다. 그대로 누른다〕</a:t>
+            </a:r>
+          </a:p>
+          <a:p>
+            <a:r>
+              <a:t>“미션 5는 실험실을 거치지 않으면 완료로 갈 수 없게 코드로 막아 두었습니다.</a:t>
+            </a:r>
+          </a:p>
+          <a:p>
+            <a:r>
+              <a:t> 관측만 보고 끝내면 ‘왜 그런지’를 건너뛰기 때문입니다.”</a:t>
+            </a:r>
+          </a:p>
+          <a:p>
+            <a:r>
+              <a:t>“여기까지는 관측 자료를 조작했습니다. 이 화면은 물리 방정식을 조작합니다.”</a:t>
+            </a:r>
+          </a:p>
+          <a:p>
+            <a:r>
+              <a:t>〔‘3. 결과 해석’ 탭 → 예측을 먼저 골라야 결과가 열린다. ②번을 일부러 ‘많이 늦어진다’로 고른다〕</a:t>
+            </a:r>
+          </a:p>
+          <a:p>
+            <a:r>
+              <a:t>〔유효 두께 0.5m → 5m → 50m〕 “지연이 3일 → 40일 → 88일로 늘어납니다.”</a:t>
+            </a:r>
+          </a:p>
+          <a:p>
+            <a:r>
+              <a:t>〔온실효과 0 → 12 W/m²〕 “연평균은 12.4도에서 14.7도로 오르는데 지연은 40일에서 꼼짝하지 않습니다.</a:t>
+            </a:r>
+          </a:p>
+          <a:p>
+            <a:r>
+              <a:t> 계절이 늦는 이유는 온실효과가 아니라 열을 머금는 양입니다. 방금 제 예측이 틀렸습니다.”</a:t>
+            </a:r>
+          </a:p>
+          <a:p>
+            <a:r>
+              <a:t>“사전 계산값을 꺼내는 게 아니라 365일을 적분합니다. 서울 5m에서 40일 — 실측 40일과 맞습니다.”</a:t>
+            </a:r>
+          </a:p>
+          <a:p/>
+          <a:p>
+            <a:r>
+              <a:t>【6:45–7:25】 숫자는 흔들리고 방향은 남는다  〔주소창에 #v=free〕</a:t>
+            </a:r>
+          </a:p>
+          <a:p>
+            <a:r>
+              <a:t>〔‘2. 증거 읽기’ 탭 → ‘지도 16지점’〕 “16지점 전부에서 늘었습니다. 한 화면에서 봅니다.”</a:t>
+            </a:r>
+          </a:p>
+          <a:p>
+            <a:r>
+              <a:t>〔비교 기간 26구간을 훑는다〕</a:t>
+            </a:r>
+          </a:p>
+          <a:p>
+            <a:r>
+              <a:t>“‘왜 하필 그 5년이냐’를 물으실 것 같아 앱 안에 넣었습니다. 1996–2000부터 2021–2025까지</a:t>
+            </a:r>
+          </a:p>
+          <a:p>
+            <a:r>
+              <a:t> 5년 창 26개입니다. 더위일은 36일에서 68일 사이에서 흔들리지만, 26개 구간 전부가 과거보다 많습니다.</a:t>
+            </a:r>
+          </a:p>
+          <a:p>
+            <a:r>
+              <a:t> 더위가 그치는 날도 26개 전부 늦어졌고, 폭은 +4일에서 +17일, 30년으로 보면 +9.6일입니다.”</a:t>
+            </a:r>
+          </a:p>
+          <a:p/>
+          <a:p>
+            <a:r>
+              <a:t>【7:25–8:30】 AI 해커톤의 AI — 결론을 대신 쓰지 않는다</a:t>
+            </a:r>
+          </a:p>
+          <a:p>
+            <a:r>
+              <a:t>〔‘3. 결론 쓰기’ 탭을 누른다. 여기 입력칸은 편집이 되므로 준비한 문장을 붙여 넣는다〕</a:t>
+            </a:r>
+          </a:p>
+          <a:p>
+            <a:r>
+              <a:t>   붙여 넣을 문장 ▸ 서울에서 더위가 늦어졌으니 우리나라 전체가 기후변화 때문에 완전히 바뀌었다</a:t>
+            </a:r>
+          </a:p>
+          <a:p>
+            <a:r>
+              <a:t>〔‘이 기기에서 빠른 점검’을 먼저 누른다〕</a:t>
+            </a:r>
+          </a:p>
+          <a:p>
+            <a:r>
+              <a:t>“기본 점검은 외부 전송이 없습니다. 지역 확대와 인과 단정을 이 자리에서 잡습니다.”</a:t>
+            </a:r>
+          </a:p>
+          <a:p>
+            <a:r>
+              <a:t>〔동의 체크박스를 읽고 체크 → ‘✦ AI 점검 요청’〕</a:t>
+            </a:r>
+          </a:p>
+          <a:p>
+            <a:r>
+              <a:t>“외부 AI는 전송 범위를 읽고 동의해야만 열립니다. 이름·학교·연락처는 입력받지 않습니다.”</a:t>
+            </a:r>
+          </a:p>
+          <a:p>
+            <a:r>
+              <a:t>〔3~5초. 오늘 아침 실측에서는 이런 유형으로 답했다〕</a:t>
+            </a:r>
+          </a:p>
+          <a:p>
+            <a:r>
+              <a:t>   “한 지역의 일부 기간 비교만으로 원인을 확정할 수 없습니다” → 다음 행동: 한계 문장 쓰기</a:t>
             </a:r>
           </a:p>
           <a:p>
@@ -1814,93 +1906,41 @@
               <a:t> 오탐 0입니다. 12초를 넘으면 그 자리에서 기기 안 점검으로 갈아탑니다. 화면이 멈추지 않습니다.”</a:t>
             </a:r>
           </a:p>
+          <a:p>
+            <a:r>
+              <a:t>“숫자는 흔들리고, 방향은 남습니다. 이 앱은 기후변화를 확정하는 도구가 아니라</a:t>
+            </a:r>
+          </a:p>
+          <a:p>
+            <a:r>
+              <a:t> 자료가 어디까지 말할 수 있는지를 배우는 도구입니다.”</a:t>
+            </a:r>
+          </a:p>
           <a:p/>
           <a:p>
             <a:r>
-              <a:t>【6:50–7:35】 데이터 뷰어가 아니라는 답  〔#v=lab〕</a:t>
-            </a:r>
-          </a:p>
-          <a:p>
-            <a:r>
-              <a:t>“여기까지는 관측 자료를 조작했습니다. 이 화면은 물리 방정식을 조작합니다.”</a:t>
-            </a:r>
-          </a:p>
-          <a:p>
-            <a:r>
-              <a:t>〔‘3. 결과 해석’ 탭 → 예측을 먼저 고르게 되어 있다. ②번을 일부러 ‘많이 늦어진다’로 고른다〕</a:t>
-            </a:r>
-          </a:p>
-          <a:p>
-            <a:r>
-              <a:t>〔유효 두께 0.5m → 5m → 50m〕 “지연이 3일 → 40일 → 88일로 늘어납니다.”</a:t>
-            </a:r>
-          </a:p>
-          <a:p>
-            <a:r>
-              <a:t>〔온실효과 0 → 12 W/m²〕 “연평균은 12.4도에서 14.7도로 오르는데 지연은 40일에서 꼼짝하지 않습니다.</a:t>
-            </a:r>
-          </a:p>
-          <a:p>
-            <a:r>
-              <a:t> 계절이 늦는 이유는 온실효과가 아니라 열을 머금는 양입니다. 방금 제 예측이 틀렸습니다.”</a:t>
-            </a:r>
-          </a:p>
-          <a:p>
-            <a:r>
-              <a:t>“사전 계산값을 꺼내는 게 아니라 365일을 적분합니다. 서울 5m에서 40일 — 실측 40일과 맞습니다.”</a:t>
+              <a:t>〔슬라이드로 복귀〕</a:t>
             </a:r>
           </a:p>
           <a:p/>
           <a:p>
             <a:r>
-              <a:t>【7:35–8:30】 숫자는 흔들리고 방향은 남는다  〔#v=free〕</a:t>
-            </a:r>
-          </a:p>
-          <a:p>
-            <a:r>
-              <a:t>〔‘2. 증거 읽기’ → ‘지도 16지점’〕 “16지점 전부에서 늘었습니다. 한 화면에서 봅니다.”</a:t>
-            </a:r>
-          </a:p>
-          <a:p>
-            <a:r>
-              <a:t>〔비교 기간 26구간을 훑는다〕</a:t>
-            </a:r>
-          </a:p>
-          <a:p>
-            <a:r>
-              <a:t>“‘왜 하필 그 5년이냐’를 물으실 것 같아 앱 안에 넣었습니다. 1996–2000부터 2021–2025까지</a:t>
-            </a:r>
-          </a:p>
-          <a:p>
-            <a:r>
-              <a:t> 5년 창 26개입니다. 더위일은 36일에서 68일 사이에서 흔들리지만, 26개 구간 전부가 과거보다 많습니다.</a:t>
-            </a:r>
-          </a:p>
-          <a:p>
-            <a:r>
-              <a:t> 더위가 그치는 날도 26개 전부 늦어졌고, 폭은 +4일에서 +17일, 30년으로 보면 +9.6일입니다.”</a:t>
-            </a:r>
-          </a:p>
-          <a:p>
-            <a:r>
-              <a:t>“숫자는 흔들리고, 방향은 남습니다. 이 앱은 기후변화를 확정하는 도구가 아니라</a:t>
-            </a:r>
-          </a:p>
-          <a:p>
-            <a:r>
-              <a:t> 자료가 어디까지 말할 수 있는지를 배우는 도구입니다.”</a:t>
-            </a:r>
-          </a:p>
-          <a:p/>
-          <a:p>
-            <a:r>
-              <a:t>〔슬라이드로 복귀〕</a:t>
-            </a:r>
-          </a:p>
-          <a:p/>
-          <a:p>
-            <a:r>
-              <a:t>⚠ 시간이 밀리면 — CERL 은 ②까지만(①③④⑤⑥⑦ 생략), 실험실·AI 를 빼고 자유탐구로 바로 간다.</a:t>
+              <a:t>⚠ 순서를 바꾸지 말 것 — 미션 5는 실험실을 열기 전에는 점검 화면으로 갈 수 없다(코드가 막는다).</a:t>
+            </a:r>
+          </a:p>
+          <a:p>
+            <a:r>
+              <a:t>⚠ AI 점검은 반드시 자유탐구 ‘3. 결론 쓰기’에서 한다. 미션 점검 화면의 입력칸은 읽기 전용이라</a:t>
+            </a:r>
+          </a:p>
+          <a:p>
+            <a:r>
+              <a:t>   준비한 문장을 붙여 넣을 수 없고, 내가 쓴 CERL 이 대신 전송된다.</a:t>
+            </a:r>
+          </a:p>
+          <a:p>
+            <a:r>
+              <a:t>⚠ 시간이 밀리면 — CERL 은 ②까지만(③~⑦ 생략), 실험실을 빼고 자유탐구로 바로 간다.</a:t>
             </a:r>
           </a:p>
           <a:p>

--- a/발표자료_Weather24_신동준.pptx
+++ b/발표자료_Weather24_신동준.pptx
@@ -889,7 +889,12 @@
           <a:p/>
           <a:p>
             <a:r>
-              <a:t>필수 경로는 5개 미션이고, 실험실·전국 16지점·26개 비교 구간은 선택 분기입니다.</a:t>
+              <a:t>필수 경로는 5개 미션입니다. 열관성 실험실은 미션 5에서만 필수이고,</a:t>
+            </a:r>
+          </a:p>
+          <a:p>
+            <a:r>
+              <a:t>전국 16지점과 26개 비교 구간은 선택 분기입니다.</a:t>
             </a:r>
           </a:p>
           <a:p/>
@@ -1587,7 +1592,7 @@
           </a:p>
           <a:p>
             <a:r>
-              <a:t>“서울에서 비 온 날은 89.2일에서 82.8일로 줄었습니다. 그런데 하루 50mm가 넘는 큰비는</a:t>
+              <a:t>“서울에서 비 온 날은 89일에서 83일로 줄었습니다. 그런데 하루 50mm가 넘는 큰비는</a:t>
             </a:r>
           </a:p>
           <a:p>
@@ -1659,6 +1664,11 @@
           </a:p>
           <a:p>
             <a:r>
+              <a:t>〔`증거 정리하기 →` 를 먼저 눌러 증거 화면으로 넘어간다〕</a:t>
+            </a:r>
+          </a:p>
+          <a:p>
+            <a:r>
               <a:t>〔`이 증거로 CERL 쓰기 →` · 한 화면에 한 칸씩 · 아래 문장은 메모장에 미리 열어 두고 붙여 넣는다〕</a:t>
             </a:r>
           </a:p>
@@ -1791,22 +1801,32 @@
           </a:p>
           <a:p>
             <a:r>
+              <a:t>〔‘2. 조건 바꾸기’ 탭 — 조작은 여기 있다. 기본 두께는 2m 이므로 먼저 프리셋 ‘한반도 5m’를 누른다〕</a:t>
+            </a:r>
+          </a:p>
+          <a:p>
+            <a:r>
+              <a:t>〔유효 두께 프리셋 0.5m → 50m → 다시 5m〕 “지연이 늘어납니다 — 화면 숫자를 그대로 읽습니다.”</a:t>
+            </a:r>
+          </a:p>
+          <a:p>
+            <a:r>
+              <a:t>〔온실효과 0 → 12 W/m²〕 “연평균 기온은 올라가는데 가장 더운 날짜는 꼼짝하지 않습니다.</a:t>
+            </a:r>
+          </a:p>
+          <a:p>
+            <a:r>
+              <a:t> 계절이 늦는 이유는 온실효과가 아니라 열을 머금는 양입니다.”</a:t>
+            </a:r>
+          </a:p>
+          <a:p>
+            <a:r>
               <a:t>〔‘3. 결과 해석’ 탭 → 예측을 먼저 골라야 결과가 열린다. ②번을 일부러 ‘많이 늦어진다’로 고른다〕</a:t>
             </a:r>
           </a:p>
           <a:p>
             <a:r>
-              <a:t>〔유효 두께 0.5m → 5m → 50m〕 “지연이 3일 → 40일 → 88일로 늘어납니다.”</a:t>
-            </a:r>
-          </a:p>
-          <a:p>
-            <a:r>
-              <a:t>〔온실효과 0 → 12 W/m²〕 “연평균은 12.4도에서 14.7도로 오르는데 지연은 40일에서 꼼짝하지 않습니다.</a:t>
-            </a:r>
-          </a:p>
-          <a:p>
-            <a:r>
-              <a:t> 계절이 늦는 이유는 온실효과가 아니라 열을 머금는 양입니다. 방금 제 예측이 틀렸습니다.”</a:t>
+              <a:t>“방금 제 예측이 틀렸습니다. 앱이 지금 제 슬라이더 값으로 계산해서 보여 줍니다.”</a:t>
             </a:r>
           </a:p>
           <a:p>
@@ -1822,12 +1842,17 @@
           </a:p>
           <a:p>
             <a:r>
-              <a:t>〔‘2. 증거 읽기’ 탭 → ‘지도 16지점’〕 “16지점 전부에서 늘었습니다. 한 화면에서 봅니다.”</a:t>
-            </a:r>
-          </a:p>
-          <a:p>
-            <a:r>
-              <a:t>〔비교 기간 26구간을 훑는다〕</a:t>
+              <a:t>〔‘1. 질문 만들기’ 탭에서 보기 전환 ‘지도 16지점’ — 지도는 이 탭에만 있다〕</a:t>
+            </a:r>
+          </a:p>
+          <a:p>
+            <a:r>
+              <a:t>“16지점 전부에서 늘었습니다. 한 화면에서 봅니다.”</a:t>
+            </a:r>
+          </a:p>
+          <a:p>
+            <a:r>
+              <a:t>〔‘2. 증거 읽기’ 탭으로 넘어가 비교 기간 26구간을 훑는다〕</a:t>
             </a:r>
           </a:p>
           <a:p>

--- a/발표자료_Weather24_신동준.pptx
+++ b/발표자료_Weather24_신동준.pptx
@@ -820,7 +820,7 @@
           <a:lstStyle/>
           <a:p>
             <a:r>
-              <a:t>〔3:00–4:30 · 1분 30초 · 1. 학습 대상 분석 — 눈썹: (1) 학습 효과〕</a:t>
+              <a:t>〔3:00–4:30 · 핵심 1분 30초 (전체 낭독 2분 20초) · 1. 학습 대상 분석 — 눈썹: (1) 학습 효과〕</a:t>
             </a:r>
           </a:p>
           <a:p/>
@@ -889,12 +889,69 @@
           <a:p/>
           <a:p>
             <a:r>
+              <a:t>〔입구 띠를 가리키며〕</a:t>
+            </a:r>
+          </a:p>
+          <a:p>
+            <a:r>
+              <a:t>멘토링에서 “너무 엄격해 진입장벽이 높다”는 지적을 받았습니다. 맞는 지적이라고 봤습니다.</a:t>
+            </a:r>
+          </a:p>
+          <a:p>
+            <a:r>
+              <a:t>다만 답을 ‘쉽게 만들기’로 잡지 않고 **입구를 둘로 나눴습니다.**</a:t>
+            </a:r>
+          </a:p>
+          <a:p>
+            <a:r>
+              <a:t>‘빠르게 체험’은 3분, 네 번 누르면 끝나고 개념은 하나만 답니다.</a:t>
+            </a:r>
+          </a:p>
+          <a:p>
+            <a:r>
+              <a:t>‘제대로 배우기’가 5개 미션, 두 차시입니다.</a:t>
+            </a:r>
+          </a:p>
+          <a:p>
+            <a:r>
+              <a:t>둘은 앞뒤 단계가 아니라 **서로 오갈 수 있는 형제 화면**입니다.</a:t>
+            </a:r>
+          </a:p>
+          <a:p/>
+          <a:p>
+            <a:r>
+              <a:t>〔10분 발표에서는 여기까지만〕</a:t>
+            </a:r>
+          </a:p>
+          <a:p>
+            <a:r>
+              <a:t>가볍게 만든 것이 라벨을 지우는 구실이 되면 안 된다고 봤습니다.</a:t>
+            </a:r>
+          </a:p>
+          <a:p>
+            <a:r>
+              <a:t>체험 모드에도 “5년 관측 신호이지 30년 기후평년이 아니다”가 그대로 붙어 있습니다.</a:t>
+            </a:r>
+          </a:p>
+          <a:p>
+            <a:r>
+              <a:t>그리고 **예측은 답이 있는 것에만 겁니다** — ‘기준을 몇 도로 둘까’는 학습자가 정하는 약속이라</a:t>
+            </a:r>
+          </a:p>
+          <a:p>
+            <a:r>
+              <a:t>맞고 틀림이 없습니다. 그래서 묻는 것은 “그 기준에서 결과가 며칠일까”입니다.</a:t>
+            </a:r>
+          </a:p>
+          <a:p/>
+          <a:p>
+            <a:r>
               <a:t>필수 경로는 5개 미션입니다. 열관성 실험실은 미션 5에서만 필수이고,</a:t>
             </a:r>
           </a:p>
           <a:p>
             <a:r>
-              <a:t>전국 16지점과 26개 비교 구간은 선택 분기입니다.</a:t>
+              <a:t>전국 16지점과 26개 비교 구간, 2100년 전망은 선택 분기입니다.</a:t>
             </a:r>
           </a:p>
           <a:p/>
@@ -975,7 +1032,7 @@
           <a:lstStyle/>
           <a:p>
             <a:r>
-              <a:t>〔4:30–6:30 · 2분 · 2. 문제 정의 및 분석 — 눈썹: (2) 주제 적합성 20점〕</a:t>
+              <a:t>〔4:30–6:30 · 핵심 2분 (전체 낭독 3분) · 2. 문제 정의 및 분석 — 눈썹: (2) 주제 적합성 20점〕</a:t>
             </a:r>
           </a:p>
           <a:p/>
@@ -1023,6 +1080,58 @@
           <a:p>
             <a:r>
               <a:t>습도·강수 변화는 지표 3종과 미션 4에서 다룹니다.</a:t>
+            </a:r>
+          </a:p>
+          <a:p/>
+          <a:p>
+            <a:r>
+              <a:t>마지막 줄이 멘토링 이후 더한 **‘2100년에도 절기는 맞을까’** 화면입니다.</a:t>
+            </a:r>
+          </a:p>
+          <a:p>
+            <a:r>
+              <a:t>저희 앱의 한 문장이 ‘절기는 고정, 기후는 이동’인데, 시나리오는 그 이동을 2100년까지 연장합니다.</a:t>
+            </a:r>
+          </a:p>
+          <a:p>
+            <a:r>
+              <a:t>1년 띠에 계절을 칠하고 **절기 눈금은 두 줄에서 같은 자리**에 둡니다 — 움직이는 건 계절뿐입니다.</a:t>
+            </a:r>
+          </a:p>
+          <a:p>
+            <a:r>
+              <a:t>서울을 가장 높은 배출 경로로 두면 **여름이 입하보다 열흘 먼저**,</a:t>
+            </a:r>
+          </a:p>
+          <a:p>
+            <a:r>
+              <a:t>**겨울은 입동보다 53일 늦게** 시작해 102일에서 28일이 됩니다. 부산·대구는 겨울이 0일입니다.</a:t>
+            </a:r>
+          </a:p>
+          <a:p/>
+          <a:p>
+            <a:r>
+              <a:t>〔10분 발표에서는 여기까지만〕</a:t>
+            </a:r>
+          </a:p>
+          <a:p>
+            <a:r>
+              <a:t>학생에게 이렇게 물을 수 있습니다 — “입하가 여름의 시작인데 여름이 더 먼저 온다면,</a:t>
+            </a:r>
+          </a:p>
+          <a:p>
+            <a:r>
+              <a:t>입하를 4월로 옮겨야 할까요?” 출처는 기상청 「지역 기후변화 전망보고서 개정판」 2024년판</a:t>
+            </a:r>
+          </a:p>
+          <a:p>
+            <a:r>
+              <a:t>하나로 통일했습니다. 상황지도에도 같은 종류의 값이 있는데 숫자가 달라서(서울 겨울 28일 대 12일)</a:t>
+            </a:r>
+          </a:p>
+          <a:p>
+            <a:r>
+              <a:t>섞지 않았습니다. 관측이 아니라 **모형이 계산한 전망**이라 실측과 나란히 놓을 수 없다고 화면이 먼저 밝힙니다.</a:t>
             </a:r>
           </a:p>
           <a:p/>
@@ -2194,7 +2303,7 @@
           <a:lstStyle/>
           <a:p>
             <a:r>
-              <a:t>〔20:00–22:30 · 2분 30초 · 6. 구현 완성도 — 눈썹: (6) 구현 완성도 30점〕</a:t>
+              <a:t>〔20:00–22:30 · 핵심 1분 40초 (전체 낭독 4분) · 6. 구현 완성도 — 눈썹: (6) 구현 완성도 30점〕</a:t>
             </a:r>
           </a:p>
           <a:p/>
@@ -2213,6 +2322,11 @@
               <a:t>여기서 파생한 것이 기준 초과 일수, 마지막 초과일, 절기 무렵 15일 평균입니다.</a:t>
             </a:r>
           </a:p>
+          <a:p>
+            <a:r>
+              <a:t>여기에 멘토링 이후 **기상청 SSP 미래 전망**을 더했습니다 — 17개 시도, 시나리오 4종, 3시기입니다.</a:t>
+            </a:r>
+          </a:p>
           <a:p/>
           <a:p>
             <a:r>
@@ -2227,6 +2341,73 @@
           <a:p/>
           <a:p>
             <a:r>
+              <a:t>〔용어 — 먼저 말하는 쪽이 이깁니다〕</a:t>
+            </a:r>
+          </a:p>
+          <a:p>
+            <a:r>
+              <a:t>“용어를 신경 써야 한다”는 지적을 받고 기준표를 다시 보다가 **저희 화면이 틀린 것을 찾았습니다.**</a:t>
+            </a:r>
+          </a:p>
+          <a:p>
+            <a:r>
+              <a:t>‘일 최고기온 33도’를 폭염주의보 기준이라고 적어 뒀는데, 그게 아닙니다.</a:t>
+            </a:r>
+          </a:p>
+          <a:p>
+            <a:r>
+              <a:t>**폭염특보는 2023년 5월 15일부터 기온이 아니라 체감온도 기준**이고,</a:t>
+            </a:r>
+          </a:p>
+          <a:p>
+            <a:r>
+              <a:t>33도는 **기후통계 ‘폭염일수’**의 정의입니다. **올해 6월 1일엔 폭염중대경보·열대야주의보도 신설**됐습니다.</a:t>
+            </a:r>
+          </a:p>
+          <a:p>
+            <a:r>
+              <a:t>그래서 표를 ①며칠인지 **세는** 약속(기후통계) ②위험을 **알리는** 약속(특보·체감온도)</a:t>
+            </a:r>
+          </a:p>
+          <a:p>
+            <a:r>
+              <a:t>③**내가 정한** 약속, 세 계열로 갈랐습니다. ②는 재현할 수 없어 ‘계산 불가’로 뒀습니다.</a:t>
+            </a:r>
+          </a:p>
+          <a:p>
+            <a:r>
+              <a:t>같은 33도인데 ①과 ②가 다른 약속이라는 것 — 저희 학습목표 ③과 정확히 같은 말입니다.</a:t>
+            </a:r>
+          </a:p>
+          <a:p/>
+          <a:p>
+            <a:r>
+              <a:t>〔10분 발표에서는 여기까지만 · 아래는 질의응답용〕</a:t>
+            </a:r>
+          </a:p>
+          <a:p>
+            <a:r>
+              <a:t>‘여름일’도 새로 셌습니다. 일 최고기온 25도 이상, 기상청 극한기후지수이자 국제 표준 ETCCDI의 SU입니다.</a:t>
+            </a:r>
+          </a:p>
+          <a:p>
+            <a:r>
+              <a:t>33도는 극단값이라 절기별 변화가 둔한데 25도는 훨씬 민감합니다. 서울이 101.4일에서 132.7일입니다.</a:t>
+            </a:r>
+          </a:p>
+          <a:p>
+            <a:r>
+              <a:t>‘더위’라는 말 자체는 — 기상청이 **수치로 정의한 지표명은 아닌 게 맞습니다.** 다만</a:t>
+            </a:r>
+          </a:p>
+          <a:p>
+            <a:r>
+              <a:t>24절기 해설의 “소서=작은 더위”처럼 공식 문서에 그대로 쓰여서, 단어를 지우지 않고 지위만 적었습니다.</a:t>
+            </a:r>
+          </a:p>
+          <a:p/>
+          <a:p>
+            <a:r>
               <a:t>〔지표 배지를 가리키며〕</a:t>
             </a:r>
           </a:p>
@@ -2242,7 +2423,33 @@
           </a:p>
           <a:p>
             <a:r>
-              <a:t>배포본은 외부 라이브러리 0개, 외부 도메인 0개, 첫 로드 134KB입니다.</a:t>
+              <a:t>SSP 전망값은 따로 **보고서 원문과 31건을 앵커로 대조**했습니다. 가져다 쓴 게 아니라 대조한 것입니다.</a:t>
+            </a:r>
+          </a:p>
+          <a:p>
+            <a:r>
+              <a:t>배포본은 외부 라이브러리 0개, 외부 도메인 0개, 첫 로드 268KB(gzip)입니다.</a:t>
+            </a:r>
+          </a:p>
+          <a:p/>
+          <a:p>
+            <a:r>
+              <a:t>— 여기서 하나 정정드립니다. 이전 자료에는 첫 로드가 134KB로 적혀 있었는데,</a:t>
+            </a:r>
+          </a:p>
+          <a:p>
+            <a:r>
+              <a:t>   그건 데이터 파일을 뺀 앱 셸만 잰 값이었습니다. 그 파일들도 첫 화면에서 같이 받으므로</a:t>
+            </a:r>
+          </a:p>
+          <a:p>
+            <a:r>
+              <a:t>   ‘첫 로드’라는 이름과 맞지 않았습니다. 실제 전송량을 다시 재서 268KB로 고쳤습니다.</a:t>
+            </a:r>
+          </a:p>
+          <a:p>
+            <a:r>
+              <a:t>   저희가 학생에게 “기준을 밝히고 세라”고 하는 것과 같은 잣대를 저희 숫자에도 댄 것입니다.</a:t>
             </a:r>
           </a:p>
           <a:p/>
@@ -9667,7 +9874,7 @@
           <a:p>
             <a:fld id="{A159ACAC-1E46-4DC0-93AF-2BFFF527AE11}" type="slidenum">
               <a:rPr lang="ko-KR" altLang="en-US" smtClean="0"/>
-              <a:t>5</a:t>
+              <a:t>2</a:t>
             </a:fld>
             <a:endParaRPr lang="ko-KR" altLang="en-US"/>
           </a:p>
@@ -10809,7 +11016,7 @@
           <a:p>
             <a:fld id="{A159ACAC-1E46-4DC0-93AF-2BFFF527AE11}" type="slidenum">
               <a:rPr lang="ko-KR" altLang="en-US" smtClean="0"/>
-              <a:t>6</a:t>
+              <a:t>3</a:t>
             </a:fld>
             <a:endParaRPr lang="ko-KR" altLang="en-US"/>
           </a:p>
@@ -11536,7 +11743,7 @@
                   <a:srgbClr val="243A5E"/>
                 </a:solidFill>
               </a:rPr>
-              <a:t>■ 필수 경로는 짧게, 심화는 선택 분기로</a:t>
+              <a:t>■ 입구를 둘로 — 같은 실측 자료를 3분과 두 차시로</a:t>
             </a:r>
           </a:p>
         </p:txBody>
@@ -11614,7 +11821,7 @@
                   <a:srgbClr val="F3ECDC"/>
                 </a:solidFill>
               </a:rPr>
-              <a:t>필수</a:t>
+              <a:t>체험</a:t>
             </a:r>
           </a:p>
         </p:txBody>
@@ -11648,7 +11855,7 @@
                   <a:srgbClr val="FFFFFF"/>
                 </a:solidFill>
               </a:rPr>
-              <a:t>5개 미션</a:t>
+              <a:t>3분 · 4클릭</a:t>
             </a:r>
           </a:p>
         </p:txBody>
@@ -11682,7 +11889,7 @@
                   <a:srgbClr val="F3ECDC"/>
                 </a:solidFill>
               </a:rPr>
-              <a:t>한 화면 한 질문</a:t>
+              <a:t>개념 1개 — 처서</a:t>
             </a:r>
           </a:p>
         </p:txBody>
@@ -11806,7 +12013,7 @@
                   <a:srgbClr val="243A5E"/>
                 </a:solidFill>
               </a:rPr>
-              <a:t>선택</a:t>
+              <a:t>학습</a:t>
             </a:r>
           </a:p>
         </p:txBody>
@@ -11840,7 +12047,7 @@
                   <a:srgbClr val="243A5E"/>
                 </a:solidFill>
               </a:rPr>
-              <a:t>열관성 실험실</a:t>
+              <a:t>5개 미션</a:t>
             </a:r>
           </a:p>
         </p:txBody>
@@ -11874,7 +12081,7 @@
                   <a:srgbClr val="6B7A8C"/>
                 </a:solidFill>
               </a:rPr>
-              <a:t>에너지수지 모형</a:t>
+              <a:t>예측 → 조작 → 내 결론</a:t>
             </a:r>
           </a:p>
         </p:txBody>
@@ -12032,7 +12239,7 @@
                   <a:srgbClr val="243A5E"/>
                 </a:solidFill>
               </a:rPr>
-              <a:t>전국 16지점</a:t>
+              <a:t>실험실 · 16지점 · 2100년</a:t>
             </a:r>
           </a:p>
         </p:txBody>
@@ -12066,7 +12273,7 @@
                   <a:srgbClr val="6B7A8C"/>
                 </a:solidFill>
               </a:rPr>
-              <a:t>26개 비교 구간</a:t>
+              <a:t>심화 분기</a:t>
             </a:r>
           </a:p>
         </p:txBody>
@@ -12292,7 +12499,7 @@
                   <a:srgbClr val="6B7A8C"/>
                 </a:solidFill>
               </a:rPr>
-              <a:t>필수 경로만으로 한 차시 완결 · 심화는 남는 시간과 학생 수준에 맞춰 선택</a:t>
+              <a:t>첫 화면에서 학습자가 고른다 · 어느 쪽에서든 반대편으로 건너갈 수 있고, 과학 라벨은 양쪽 동일</a:t>
             </a:r>
           </a:p>
         </p:txBody>
@@ -12379,7 +12586,7 @@
           <a:p>
             <a:fld id="{A159ACAC-1E46-4DC0-93AF-2BFFF527AE11}" type="slidenum">
               <a:rPr lang="ko-KR" altLang="en-US" smtClean="0"/>
-              <a:t>7</a:t>
+              <a:t>4</a:t>
             </a:fld>
             <a:endParaRPr lang="ko-KR" altLang="en-US"/>
           </a:p>
@@ -12744,7 +12951,7 @@
                   <a:schemeClr val="tx1"/>
                 </a:solidFill>
               </a:rPr>
-              <a:t>  · (확장) CO₂–기온 상관 → ‘지구 맥락’ 화면</a:t>
+              <a:t>  · (확장) CO₂–기온 상관 · 미래 전망 → ‘지구 맥락’ · ‘2100년’ 화면</a:t>
             </a:r>
             <a:endParaRPr lang="en-US" altLang="ko-KR" sz="1200" dirty="0">
               <a:solidFill>
@@ -13776,7 +13983,7 @@
           <a:p>
             <a:fld id="{A159ACAC-1E46-4DC0-93AF-2BFFF527AE11}" type="slidenum">
               <a:rPr lang="ko-KR" altLang="en-US" smtClean="0"/>
-              <a:t>8</a:t>
+              <a:t>5</a:t>
             </a:fld>
             <a:endParaRPr lang="ko-KR" altLang="en-US"/>
           </a:p>
@@ -15705,7 +15912,7 @@
           <a:p>
             <a:fld id="{A159ACAC-1E46-4DC0-93AF-2BFFF527AE11}" type="slidenum">
               <a:rPr lang="ko-KR" altLang="en-US" smtClean="0"/>
-              <a:t>9</a:t>
+              <a:t>6</a:t>
             </a:fld>
             <a:endParaRPr lang="ko-KR" altLang="en-US"/>
           </a:p>
@@ -16013,7 +16220,7 @@
                   <a:schemeClr val="tx1"/>
                 </a:solidFill>
               </a:rPr>
-              <a:t>■ 탐구 범위 — 16지점 × 24절기 × 3지표 × 26구간</a:t>
+              <a:t>■ 탐구 범위 — 관측 16지점 × 24절기 × 3지표 × 26구간</a:t>
             </a:r>
             <a:endParaRPr lang="en-US" altLang="ko-KR" sz="1200" dirty="0">
               <a:solidFill>
@@ -16032,7 +16239,7 @@
                   <a:schemeClr val="tx1"/>
                 </a:solidFill>
               </a:rPr>
-              <a:t>  · 보기 3종 — 그래프 / 전국 지도 / 표</a:t>
+              <a:t>  · 미래 전망 — SSP 4종 × 3시기 (기상청 전망보고서 2024)</a:t>
             </a:r>
             <a:endParaRPr lang="en-US" altLang="ko-KR" sz="1200" dirty="0">
               <a:solidFill>
@@ -16051,7 +16258,7 @@
                   <a:schemeClr val="tx1"/>
                 </a:solidFill>
               </a:rPr>
-              <a:t>  · 조작부마다 화면 라벨 명시 · 결과 수치를 조작부 바로 위에</a:t>
+              <a:t>  · 보기 3종 — 그래프 / 전국 지도 / 표 · 조작부마다 화면 라벨 명시</a:t>
             </a:r>
             <a:endParaRPr lang="en-US" altLang="ko-KR" sz="1200" dirty="0">
               <a:solidFill>
@@ -16650,6 +16857,17 @@
               <a:t>  · 온실효과↑ → 곡선 상승·지연 불변 → “둘은 다른 원인”</a:t>
             </a:r>
           </a:p>
+          <a:p>
+            <a:pPr algn="l"/>
+            <a:r>
+              <a:rPr sz="1200" b="0">
+                <a:solidFill>
+                  <a:srgbClr val="243A5E"/>
+                </a:solidFill>
+              </a:rPr>
+              <a:t>  · 배출 시나리오↑ → 계절 이동·절기 고정 → “움직이는 건 계절”</a:t>
+            </a:r>
+          </a:p>
         </p:txBody>
       </p:sp>
       <p:pic>
@@ -16797,7 +17015,7 @@
           <a:p>
             <a:fld id="{A159ACAC-1E46-4DC0-93AF-2BFFF527AE11}" type="slidenum">
               <a:rPr lang="ko-KR" altLang="en-US" smtClean="0"/>
-              <a:t>10</a:t>
+              <a:t>7</a:t>
             </a:fld>
             <a:endParaRPr lang="ko-KR" altLang="en-US"/>
           </a:p>
@@ -18892,7 +19110,7 @@
           <a:p>
             <a:fld id="{A159ACAC-1E46-4DC0-93AF-2BFFF527AE11}" type="slidenum">
               <a:rPr lang="ko-KR" altLang="en-US" smtClean="0"/>
-              <a:t>11</a:t>
+              <a:t>8</a:t>
             </a:fld>
             <a:endParaRPr lang="ko-KR" altLang="en-US"/>
           </a:p>
@@ -19078,7 +19296,7 @@
                   <a:schemeClr val="tx1"/>
                 </a:solidFill>
               </a:rPr>
-              <a:t>■ 기상청 ASOS 종관기상관측 일자료 1969–2026</a:t>
+              <a:t>■ 기상청 ASOS 일자료 1969–2026 + SSP 전망(전망보고서 2024)</a:t>
             </a:r>
             <a:endParaRPr lang="en-US" altLang="ko-KR" sz="1200" dirty="0">
               <a:solidFill>
@@ -19097,7 +19315,7 @@
                   <a:schemeClr val="tx1"/>
                 </a:solidFill>
               </a:rPr>
-              <a:t>  · 16지점 × 24절기 × 3지표(기온·강수·습도)</a:t>
+              <a:t>  · 16지점 × 24절기 × 3지표(기온·강수·습도) · 17개 시도 × SSP 4종</a:t>
             </a:r>
             <a:endParaRPr lang="en-US" altLang="ko-KR" sz="1200" dirty="0">
               <a:solidFill>
@@ -19388,7 +19606,7 @@
         <p:spPr>
           <a:xfrm>
             <a:off x="1019602" y="5404103"/>
-            <a:ext cx="1070979" cy="566928"/>
+            <a:ext cx="834837" cy="566928"/>
           </a:xfrm>
           <a:prstGeom prst="roundRect">
             <a:avLst>
@@ -19434,7 +19652,7 @@
         <p:spPr>
           <a:xfrm>
             <a:off x="1056178" y="5449823"/>
-            <a:ext cx="997827" cy="294802"/>
+            <a:ext cx="761685" cy="294802"/>
           </a:xfrm>
           <a:prstGeom prst="rect">
             <a:avLst/>
@@ -19468,7 +19686,7 @@
         <p:spPr>
           <a:xfrm>
             <a:off x="1056178" y="5715913"/>
-            <a:ext cx="997827" cy="238109"/>
+            <a:ext cx="761685" cy="238109"/>
           </a:xfrm>
           <a:prstGeom prst="rect">
             <a:avLst/>
@@ -19488,7 +19706,7 @@
                   <a:srgbClr val="6B7A8C"/>
                 </a:solidFill>
               </a:rPr>
-              <a:t>자동 회귀 검증</a:t>
+              <a:t>회귀 검증</a:t>
             </a:r>
           </a:p>
         </p:txBody>
@@ -19501,8 +19719,8 @@
         </p:nvSpPr>
         <p:spPr>
           <a:xfrm>
-            <a:off x="2200309" y="5404103"/>
-            <a:ext cx="1070979" cy="566928"/>
+            <a:off x="1964167" y="5404103"/>
+            <a:ext cx="834837" cy="566928"/>
           </a:xfrm>
           <a:prstGeom prst="roundRect">
             <a:avLst>
@@ -19547,8 +19765,8 @@
         </p:nvSpPr>
         <p:spPr>
           <a:xfrm>
-            <a:off x="2236885" y="5449823"/>
-            <a:ext cx="997827" cy="294802"/>
+            <a:off x="2000743" y="5449823"/>
+            <a:ext cx="761685" cy="294802"/>
           </a:xfrm>
           <a:prstGeom prst="rect">
             <a:avLst/>
@@ -19568,7 +19786,7 @@
                   <a:srgbClr val="243A5E"/>
                 </a:solidFill>
               </a:rPr>
-              <a:t>0건</a:t>
+              <a:t>31건</a:t>
             </a:r>
           </a:p>
         </p:txBody>
@@ -19581,8 +19799,8 @@
         </p:nvSpPr>
         <p:spPr>
           <a:xfrm>
-            <a:off x="2236885" y="5715913"/>
-            <a:ext cx="997827" cy="238109"/>
+            <a:off x="2000743" y="5715913"/>
+            <a:ext cx="761685" cy="238109"/>
           </a:xfrm>
           <a:prstGeom prst="rect">
             <a:avLst/>
@@ -19602,7 +19820,7 @@
                   <a:srgbClr val="6B7A8C"/>
                 </a:solidFill>
               </a:rPr>
-              <a:t>겹침·잘림·오류</a:t>
+              <a:t>SSP 대조</a:t>
             </a:r>
           </a:p>
         </p:txBody>
@@ -19615,8 +19833,8 @@
         </p:nvSpPr>
         <p:spPr>
           <a:xfrm>
-            <a:off x="3381016" y="5404103"/>
-            <a:ext cx="1070979" cy="566928"/>
+            <a:off x="2908733" y="5404103"/>
+            <a:ext cx="834837" cy="566928"/>
           </a:xfrm>
           <a:prstGeom prst="roundRect">
             <a:avLst>
@@ -19661,8 +19879,8 @@
         </p:nvSpPr>
         <p:spPr>
           <a:xfrm>
-            <a:off x="3417592" y="5449823"/>
-            <a:ext cx="997827" cy="294802"/>
+            <a:off x="2945309" y="5449823"/>
+            <a:ext cx="761685" cy="294802"/>
           </a:xfrm>
           <a:prstGeom prst="rect">
             <a:avLst/>
@@ -19682,7 +19900,7 @@
                   <a:srgbClr val="243A5E"/>
                 </a:solidFill>
               </a:rPr>
-              <a:t>134KB</a:t>
+              <a:t>0건</a:t>
             </a:r>
           </a:p>
         </p:txBody>
@@ -19695,8 +19913,8 @@
         </p:nvSpPr>
         <p:spPr>
           <a:xfrm>
-            <a:off x="3417592" y="5715913"/>
-            <a:ext cx="997827" cy="238109"/>
+            <a:off x="2945309" y="5715913"/>
+            <a:ext cx="761685" cy="238109"/>
           </a:xfrm>
           <a:prstGeom prst="rect">
             <a:avLst/>
@@ -19716,7 +19934,7 @@
                   <a:srgbClr val="6B7A8C"/>
                 </a:solidFill>
               </a:rPr>
-              <a:t>첫 로드</a:t>
+              <a:t>겹침·잘림</a:t>
             </a:r>
           </a:p>
         </p:txBody>
@@ -19729,8 +19947,8 @@
         </p:nvSpPr>
         <p:spPr>
           <a:xfrm>
-            <a:off x="4561724" y="5404103"/>
-            <a:ext cx="1070979" cy="566928"/>
+            <a:off x="3853299" y="5404103"/>
+            <a:ext cx="834837" cy="566928"/>
           </a:xfrm>
           <a:prstGeom prst="roundRect">
             <a:avLst>
@@ -19775,8 +19993,8 @@
         </p:nvSpPr>
         <p:spPr>
           <a:xfrm>
-            <a:off x="4598300" y="5449823"/>
-            <a:ext cx="997827" cy="294802"/>
+            <a:off x="3889875" y="5449823"/>
+            <a:ext cx="761685" cy="294802"/>
           </a:xfrm>
           <a:prstGeom prst="rect">
             <a:avLst/>
@@ -19796,7 +20014,7 @@
                   <a:srgbClr val="243A5E"/>
                 </a:solidFill>
               </a:rPr>
-              <a:t>0개</a:t>
+              <a:t>268KB</a:t>
             </a:r>
           </a:p>
         </p:txBody>
@@ -19809,8 +20027,8 @@
         </p:nvSpPr>
         <p:spPr>
           <a:xfrm>
-            <a:off x="4598300" y="5715913"/>
-            <a:ext cx="997827" cy="238109"/>
+            <a:off x="3889875" y="5715913"/>
+            <a:ext cx="761685" cy="238109"/>
           </a:xfrm>
           <a:prstGeom prst="rect">
             <a:avLst/>
@@ -19830,7 +20048,7 @@
                   <a:srgbClr val="6B7A8C"/>
                 </a:solidFill>
               </a:rPr>
-              <a:t>외부 도메인</a:t>
+              <a:t>첫 로드 gzip</a:t>
             </a:r>
           </a:p>
         </p:txBody>
@@ -19838,6 +20056,120 @@
       <p:sp>
         <p:nvSpPr>
           <p:cNvPr id="30" name="Rounded Rectangle 29"/>
+          <p:cNvSpPr/>
+          <p:nvPr/>
+        </p:nvSpPr>
+        <p:spPr>
+          <a:xfrm>
+            <a:off x="4797865" y="5404103"/>
+            <a:ext cx="834837" cy="566928"/>
+          </a:xfrm>
+          <a:prstGeom prst="roundRect">
+            <a:avLst>
+              <a:gd name="adj" fmla="val 6000"/>
+            </a:avLst>
+          </a:prstGeom>
+          <a:solidFill>
+            <a:srgbClr val="EFF5FB"/>
+          </a:solidFill>
+          <a:ln w="9525">
+            <a:solidFill>
+              <a:srgbClr val="C8D4E4"/>
+            </a:solidFill>
+          </a:ln>
+          <a:effectLst/>
+        </p:spPr>
+        <p:style>
+          <a:lnRef idx="1">
+            <a:schemeClr val="accent1"/>
+          </a:lnRef>
+          <a:fillRef idx="3">
+            <a:schemeClr val="accent1"/>
+          </a:fillRef>
+          <a:effectRef idx="2">
+            <a:schemeClr val="accent1"/>
+          </a:effectRef>
+          <a:fontRef idx="minor">
+            <a:schemeClr val="lt1"/>
+          </a:fontRef>
+        </p:style>
+        <p:txBody>
+          <a:bodyPr rtlCol="0" anchor="ctr"/>
+          <a:lstStyle/>
+          <a:p/>
+        </p:txBody>
+      </p:sp>
+      <p:sp>
+        <p:nvSpPr>
+          <p:cNvPr id="31" name="TextBox 30"/>
+          <p:cNvSpPr txBox="1"/>
+          <p:nvPr/>
+        </p:nvSpPr>
+        <p:spPr>
+          <a:xfrm>
+            <a:off x="4834441" y="5449823"/>
+            <a:ext cx="761685" cy="294802"/>
+          </a:xfrm>
+          <a:prstGeom prst="rect">
+            <a:avLst/>
+          </a:prstGeom>
+          <a:noFill/>
+        </p:spPr>
+        <p:txBody>
+          <a:bodyPr wrap="square" anchor="t" lIns="54864" rIns="54864" tIns="27432" bIns="27432">
+            <a:spAutoFit/>
+          </a:bodyPr>
+          <a:lstStyle/>
+          <a:p>
+            <a:pPr algn="ctr"/>
+            <a:r>
+              <a:rPr sz="1300" b="1">
+                <a:solidFill>
+                  <a:srgbClr val="243A5E"/>
+                </a:solidFill>
+              </a:rPr>
+              <a:t>0개</a:t>
+            </a:r>
+          </a:p>
+        </p:txBody>
+      </p:sp>
+      <p:sp>
+        <p:nvSpPr>
+          <p:cNvPr id="32" name="TextBox 31"/>
+          <p:cNvSpPr txBox="1"/>
+          <p:nvPr/>
+        </p:nvSpPr>
+        <p:spPr>
+          <a:xfrm>
+            <a:off x="4834441" y="5715913"/>
+            <a:ext cx="761685" cy="238109"/>
+          </a:xfrm>
+          <a:prstGeom prst="rect">
+            <a:avLst/>
+          </a:prstGeom>
+          <a:noFill/>
+        </p:spPr>
+        <p:txBody>
+          <a:bodyPr wrap="square" anchor="t" lIns="54864" rIns="54864" tIns="27432" bIns="27432">
+            <a:spAutoFit/>
+          </a:bodyPr>
+          <a:lstStyle/>
+          <a:p>
+            <a:pPr algn="ctr"/>
+            <a:r>
+              <a:rPr sz="850" b="0">
+                <a:solidFill>
+                  <a:srgbClr val="6B7A8C"/>
+                </a:solidFill>
+              </a:rPr>
+              <a:t>외부 의존</a:t>
+            </a:r>
+          </a:p>
+        </p:txBody>
+      </p:sp>
+      <p:sp>
+        <p:nvSpPr>
+          <p:cNvPr id="33" name="Rounded Rectangle 32"/>
           <p:cNvSpPr/>
           <p:nvPr/>
         </p:nvSpPr>
@@ -19883,7 +20215,7 @@
       </p:sp>
       <p:sp>
         <p:nvSpPr>
-          <p:cNvPr id="31" name="Rectangle 30"/>
+          <p:cNvPr id="34" name="Rectangle 33"/>
           <p:cNvSpPr/>
           <p:nvPr/>
         </p:nvSpPr>
@@ -19927,7 +20259,7 @@
       </p:sp>
       <p:sp>
         <p:nvSpPr>
-          <p:cNvPr id="32" name="TextBox 31"/>
+          <p:cNvPr id="35" name="TextBox 34"/>
           <p:cNvSpPr txBox="1"/>
           <p:nvPr/>
         </p:nvSpPr>
@@ -19961,7 +20293,7 @@
       </p:sp>
       <p:sp>
         <p:nvSpPr>
-          <p:cNvPr id="33" name="TextBox 32"/>
+          <p:cNvPr id="36" name="TextBox 35"/>
           <p:cNvSpPr txBox="1"/>
           <p:nvPr/>
         </p:nvSpPr>
@@ -20014,7 +20346,7 @@
       </p:sp>
       <p:sp>
         <p:nvSpPr>
-          <p:cNvPr id="34" name="Rounded Rectangle 33"/>
+          <p:cNvPr id="37" name="Rounded Rectangle 36"/>
           <p:cNvSpPr/>
           <p:nvPr/>
         </p:nvSpPr>
@@ -20060,7 +20392,7 @@
       </p:sp>
       <p:sp>
         <p:nvSpPr>
-          <p:cNvPr id="35" name="Rectangle 34"/>
+          <p:cNvPr id="38" name="Rectangle 37"/>
           <p:cNvSpPr/>
           <p:nvPr/>
         </p:nvSpPr>
@@ -20104,7 +20436,7 @@
       </p:sp>
       <p:sp>
         <p:nvSpPr>
-          <p:cNvPr id="36" name="TextBox 35"/>
+          <p:cNvPr id="39" name="TextBox 38"/>
           <p:cNvSpPr txBox="1"/>
           <p:nvPr/>
         </p:nvSpPr>
@@ -20131,14 +20463,14 @@
                   <a:srgbClr val="E76F51"/>
                 </a:solidFill>
               </a:rPr>
-              <a:t>AI 응답 (배포본 실측 · 200 OK)</a:t>
-            </a:r>
-          </a:p>
-        </p:txBody>
-      </p:sp>
-      <p:sp>
-        <p:nvSpPr>
-          <p:cNvPr id="37" name="TextBox 36"/>
+              <a:t>AI 응답 (배포본 실측 · OK)</a:t>
+            </a:r>
+          </a:p>
+        </p:txBody>
+      </p:sp>
+      <p:sp>
+        <p:nvSpPr>
+          <p:cNvPr id="40" name="TextBox 39"/>
           <p:cNvSpPr txBox="1"/>
           <p:nvPr/>
         </p:nvSpPr>
@@ -20221,7 +20553,7 @@
       </p:sp>
       <p:sp>
         <p:nvSpPr>
-          <p:cNvPr id="38" name="TextBox 37"/>
+          <p:cNvPr id="41" name="TextBox 40"/>
           <p:cNvSpPr txBox="1"/>
           <p:nvPr/>
         </p:nvSpPr>
@@ -20266,7 +20598,7 @@
       </p:sp>
       <p:sp>
         <p:nvSpPr>
-          <p:cNvPr id="39" name="TextBox 38"/>
+          <p:cNvPr id="42" name="TextBox 41"/>
           <p:cNvSpPr txBox="1"/>
           <p:nvPr/>
         </p:nvSpPr>
@@ -20300,7 +20632,7 @@
       </p:sp>
       <p:sp>
         <p:nvSpPr>
-          <p:cNvPr id="40" name="Rounded Rectangle 39"/>
+          <p:cNvPr id="43" name="Rounded Rectangle 42"/>
           <p:cNvSpPr/>
           <p:nvPr/>
         </p:nvSpPr>
@@ -20346,7 +20678,7 @@
       </p:sp>
       <p:sp>
         <p:nvSpPr>
-          <p:cNvPr id="41" name="TextBox 40"/>
+          <p:cNvPr id="44" name="TextBox 43"/>
           <p:cNvSpPr txBox="1"/>
           <p:nvPr/>
         </p:nvSpPr>
@@ -20380,7 +20712,7 @@
       </p:sp>
       <p:sp>
         <p:nvSpPr>
-          <p:cNvPr id="42" name="TextBox 41"/>
+          <p:cNvPr id="45" name="TextBox 44"/>
           <p:cNvSpPr txBox="1"/>
           <p:nvPr/>
         </p:nvSpPr>
@@ -20414,7 +20746,7 @@
       </p:sp>
       <p:sp>
         <p:nvSpPr>
-          <p:cNvPr id="43" name="Rounded Rectangle 42"/>
+          <p:cNvPr id="46" name="Rounded Rectangle 45"/>
           <p:cNvSpPr/>
           <p:nvPr/>
         </p:nvSpPr>
@@ -20460,7 +20792,7 @@
       </p:sp>
       <p:sp>
         <p:nvSpPr>
-          <p:cNvPr id="44" name="TextBox 43"/>
+          <p:cNvPr id="47" name="TextBox 46"/>
           <p:cNvSpPr txBox="1"/>
           <p:nvPr/>
         </p:nvSpPr>
@@ -20494,7 +20826,7 @@
       </p:sp>
       <p:sp>
         <p:nvSpPr>
-          <p:cNvPr id="45" name="TextBox 44"/>
+          <p:cNvPr id="48" name="TextBox 47"/>
           <p:cNvSpPr txBox="1"/>
           <p:nvPr/>
         </p:nvSpPr>
@@ -20528,7 +20860,7 @@
       </p:sp>
       <p:sp>
         <p:nvSpPr>
-          <p:cNvPr id="46" name="Rounded Rectangle 45"/>
+          <p:cNvPr id="49" name="Rounded Rectangle 48"/>
           <p:cNvSpPr/>
           <p:nvPr/>
         </p:nvSpPr>
@@ -20574,7 +20906,7 @@
       </p:sp>
       <p:sp>
         <p:nvSpPr>
-          <p:cNvPr id="47" name="TextBox 46"/>
+          <p:cNvPr id="50" name="TextBox 49"/>
           <p:cNvSpPr txBox="1"/>
           <p:nvPr/>
         </p:nvSpPr>
@@ -20608,7 +20940,7 @@
       </p:sp>
       <p:sp>
         <p:nvSpPr>
-          <p:cNvPr id="48" name="TextBox 47"/>
+          <p:cNvPr id="51" name="TextBox 50"/>
           <p:cNvSpPr txBox="1"/>
           <p:nvPr/>
         </p:nvSpPr>
@@ -20642,7 +20974,7 @@
       </p:sp>
       <p:sp>
         <p:nvSpPr>
-          <p:cNvPr id="49" name="TextBox 48"/>
+          <p:cNvPr id="52" name="TextBox 51"/>
           <p:cNvSpPr txBox="1"/>
           <p:nvPr/>
         </p:nvSpPr>

--- a/발표자료_Weather24_신동준.pptx
+++ b/발표자료_Weather24_신동준.pptx
@@ -2428,7 +2428,7 @@
           </a:p>
           <a:p>
             <a:r>
-              <a:t>배포본은 외부 라이브러리 0개, 외부 도메인 0개, 첫 로드 268KB(gzip)입니다.</a:t>
+              <a:t>배포본은 외부 라이브러리 0개, 외부 도메인 0개, 첫 로드 277KB(gzip)입니다.</a:t>
             </a:r>
           </a:p>
           <a:p/>
@@ -2444,7 +2444,7 @@
           </a:p>
           <a:p>
             <a:r>
-              <a:t>   ‘첫 로드’라는 이름과 맞지 않았습니다. 실제 전송량을 다시 재서 268KB로 고쳤습니다.</a:t>
+              <a:t>   ‘첫 로드’라는 이름과 맞지 않았습니다. 실제 전송량을 다시 재서 277KB로 고쳤습니다.</a:t>
             </a:r>
           </a:p>
           <a:p>
@@ -20014,7 +20014,7 @@
                   <a:srgbClr val="243A5E"/>
                 </a:solidFill>
               </a:rPr>
-              <a:t>268KB</a:t>
+              <a:t>277KB</a:t>
             </a:r>
           </a:p>
         </p:txBody>

--- a/발표자료_Weather24_신동준.pptx
+++ b/발표자료_Weather24_신동준.pptx
@@ -2428,7 +2428,7 @@
           </a:p>
           <a:p>
             <a:r>
-              <a:t>배포본은 외부 라이브러리 0개, 외부 도메인 0개, 첫 로드 277KB(gzip)입니다.</a:t>
+              <a:t>배포본은 외부 라이브러리 0개, 외부 도메인 0개, 첫 로드 283KB(gzip)입니다.</a:t>
             </a:r>
           </a:p>
           <a:p/>
@@ -2444,7 +2444,7 @@
           </a:p>
           <a:p>
             <a:r>
-              <a:t>   ‘첫 로드’라는 이름과 맞지 않았습니다. 실제 전송량을 다시 재서 277KB로 고쳤습니다.</a:t>
+              <a:t>   ‘첫 로드’라는 이름과 맞지 않았습니다. 실제 전송량을 다시 재서 283KB로 고쳤습니다.</a:t>
             </a:r>
           </a:p>
           <a:p>
@@ -20014,7 +20014,7 @@
                   <a:srgbClr val="243A5E"/>
                 </a:solidFill>
               </a:rPr>
-              <a:t>277KB</a:t>
+              <a:t>283KB</a:t>
             </a:r>
           </a:p>
         </p:txBody>

--- a/발표자료_Weather24_신동준.pptx
+++ b/발표자료_Weather24_신동준.pptx
@@ -2428,7 +2428,7 @@
           </a:p>
           <a:p>
             <a:r>
-              <a:t>배포본은 외부 라이브러리 0개, 외부 도메인 0개, 첫 로드 283KB(gzip)입니다.</a:t>
+              <a:t>배포본은 외부 라이브러리 0개, 외부 도메인 0개, 첫 로드 287KB(gzip)입니다.</a:t>
             </a:r>
           </a:p>
           <a:p/>
@@ -2444,7 +2444,7 @@
           </a:p>
           <a:p>
             <a:r>
-              <a:t>   ‘첫 로드’라는 이름과 맞지 않았습니다. 실제 전송량을 다시 재서 283KB로 고쳤습니다.</a:t>
+              <a:t>   ‘첫 로드’라는 이름과 맞지 않았습니다. 실제 전송량을 다시 재서 287KB로 고쳤습니다.</a:t>
             </a:r>
           </a:p>
           <a:p>
@@ -20014,7 +20014,7 @@
                   <a:srgbClr val="243A5E"/>
                 </a:solidFill>
               </a:rPr>
-              <a:t>283KB</a:t>
+              <a:t>287KB</a:t>
             </a:r>
           </a:p>
         </p:txBody>

--- a/발표자료_Weather24_신동준.pptx
+++ b/발표자료_Weather24_신동준.pptx
@@ -904,7 +904,12 @@
           </a:p>
           <a:p>
             <a:r>
-              <a:t>‘빠르게 체험’은 3분, 네 번 누르면 끝나고 개념은 하나만 답니다.</a:t>
+              <a:t>‘빠르게 절기 체험하기’는 3분입니다. &lt;b&gt;24절기 중 하나를 골라&lt;/b&gt; 네 번 누르면 끝나고,</a:t>
+            </a:r>
+          </a:p>
+          <a:p>
+            <a:r>
+              <a:t>개념은 하나만 답니다. 고른 절기를 ‘지금’으로 볼지 ‘2100년’으로 볼지도 그 자리에서 고릅니다.</a:t>
             </a:r>
           </a:p>
           <a:p>
@@ -2428,7 +2433,7 @@
           </a:p>
           <a:p>
             <a:r>
-              <a:t>배포본은 외부 라이브러리 0개, 외부 도메인 0개, 첫 로드 287KB(gzip)입니다.</a:t>
+              <a:t>배포본은 외부 라이브러리 0개, 외부 도메인 0개, 첫 로드 291KB(gzip)입니다.</a:t>
             </a:r>
           </a:p>
           <a:p/>
@@ -2444,7 +2449,7 @@
           </a:p>
           <a:p>
             <a:r>
-              <a:t>   ‘첫 로드’라는 이름과 맞지 않았습니다. 실제 전송량을 다시 재서 287KB로 고쳤습니다.</a:t>
+              <a:t>   ‘첫 로드’라는 이름과 맞지 않았습니다. 실제 전송량을 다시 재서 291KB로 고쳤습니다.</a:t>
             </a:r>
           </a:p>
           <a:p>
@@ -11889,7 +11894,7 @@
                   <a:srgbClr val="F3ECDC"/>
                 </a:solidFill>
               </a:rPr>
-              <a:t>개념 1개 — 처서</a:t>
+              <a:t>24절기 중 하나</a:t>
             </a:r>
           </a:p>
         </p:txBody>
@@ -20014,7 +20019,7 @@
                   <a:srgbClr val="243A5E"/>
                 </a:solidFill>
               </a:rPr>
-              <a:t>287KB</a:t>
+              <a:t>291KB</a:t>
             </a:r>
           </a:p>
         </p:txBody>

--- a/발표자료_Weather24_신동준.pptx
+++ b/발표자료_Weather24_신동준.pptx
@@ -2433,7 +2433,7 @@
           </a:p>
           <a:p>
             <a:r>
-              <a:t>배포본은 외부 라이브러리 0개, 외부 도메인 0개, 첫 로드 291KB(gzip)입니다.</a:t>
+              <a:t>배포본은 외부 라이브러리 0개, 외부 도메인 0개, 첫 로드 300KB(gzip)입니다.</a:t>
             </a:r>
           </a:p>
           <a:p/>
@@ -2449,7 +2449,7 @@
           </a:p>
           <a:p>
             <a:r>
-              <a:t>   ‘첫 로드’라는 이름과 맞지 않았습니다. 실제 전송량을 다시 재서 291KB로 고쳤습니다.</a:t>
+              <a:t>   ‘첫 로드’라는 이름과 맞지 않았습니다. 실제 전송량을 다시 재서 300KB로 고쳤습니다.</a:t>
             </a:r>
           </a:p>
           <a:p>
@@ -20019,7 +20019,7 @@
                   <a:srgbClr val="243A5E"/>
                 </a:solidFill>
               </a:rPr>
-              <a:t>291KB</a:t>
+              <a:t>300KB</a:t>
             </a:r>
           </a:p>
         </p:txBody>
